--- a/assets/illustrations.pptx
+++ b/assets/illustrations.pptx
@@ -5,19 +5,20 @@
     <p:sldMasterId id="2147483648" r:id="rId1"/>
   </p:sldMasterIdLst>
   <p:sldIdLst>
-    <p:sldId id="256" r:id="rId7"/>
-    <p:sldId id="257" r:id="rId8"/>
-    <p:sldId id="258" r:id="rId9"/>
-    <p:sldId id="259" r:id="rId10"/>
-    <p:sldId id="260" r:id="rId11"/>
-    <p:sldId id="261" r:id="rId12"/>
-    <p:sldId id="262" r:id="rId13"/>
-    <p:sldId id="263" r:id="rId14"/>
-    <p:sldId id="264" r:id="rId15"/>
-    <p:sldId id="265" r:id="rId16"/>
-    <p:sldId id="266" r:id="rId17"/>
+    <p:sldId id="256" r:id="rId2"/>
+    <p:sldId id="257" r:id="rId3"/>
+    <p:sldId id="258" r:id="rId4"/>
+    <p:sldId id="259" r:id="rId5"/>
+    <p:sldId id="260" r:id="rId6"/>
+    <p:sldId id="261" r:id="rId7"/>
+    <p:sldId id="262" r:id="rId8"/>
+    <p:sldId id="263" r:id="rId9"/>
+    <p:sldId id="264" r:id="rId10"/>
+    <p:sldId id="265" r:id="rId11"/>
+    <p:sldId id="266" r:id="rId12"/>
+    <p:sldId id="267" r:id="rId13"/>
   </p:sldIdLst>
-  <p:sldSz cx="12191695" cy="6858000" type="screen4x3"/>
+  <p:sldSz cx="12192000" cy="6858000"/>
   <p:notesSz cx="6858000" cy="9144000"/>
   <p:defaultTextStyle>
     <a:defPPr>
@@ -114,6 +115,22 @@
       </a:defRPr>
     </a:lvl9pPr>
   </p:defaultTextStyle>
+  <p:extLst>
+    <p:ext uri="{EFAFB233-063F-42B5-8137-9DF3F51BA10A}">
+      <p15:sldGuideLst xmlns:p15="http://schemas.microsoft.com/office/powerpoint/2012/main">
+        <p15:guide id="1" orient="horz" pos="2160">
+          <p15:clr>
+            <a:srgbClr val="A4A3A4"/>
+          </p15:clr>
+        </p15:guide>
+        <p15:guide id="2" pos="2880">
+          <p15:clr>
+            <a:srgbClr val="A4A3A4"/>
+          </p15:clr>
+        </p15:guide>
+      </p15:sldGuideLst>
+    </p:ext>
+  </p:extLst>
 </p:presentation>
 </file>
 
@@ -155,10 +172,9 @@
           <a:lstStyle/>
           <a:p>
             <a:r>
-              <a:rPr lang="en-US" smtClean="0"/>
+              <a:rPr lang="en-US"/>
               <a:t>Click to edit Master title style</a:t>
             </a:r>
-            <a:endParaRPr lang="en-US"/>
           </a:p>
         </p:txBody>
       </p:sp>
@@ -274,10 +290,9 @@
           </a:lstStyle>
           <a:p>
             <a:r>
-              <a:rPr lang="en-US" smtClean="0"/>
+              <a:rPr lang="en-US"/>
               <a:t>Click to edit Master subtitle style</a:t>
             </a:r>
-            <a:endParaRPr lang="en-US"/>
           </a:p>
         </p:txBody>
       </p:sp>
@@ -298,7 +313,7 @@
           <a:p>
             <a:fld id="{5BCAD085-E8A6-8845-BD4E-CB4CCA059FC4}" type="datetimeFigureOut">
               <a:rPr lang="en-US" smtClean="0"/>
-              <a:t>1/27/13</a:t>
+              <a:t>10/9/2026</a:t>
             </a:fld>
             <a:endParaRPr lang="en-US"/>
           </a:p>
@@ -340,7 +355,7 @@
           <a:p>
             <a:fld id="{C1FF6DA9-008F-8B48-92A6-B652298478BF}" type="slidenum">
               <a:rPr lang="en-US" smtClean="0"/>
-              <a:t>‹#›</a:t>
+              <a:t>‹N°›</a:t>
             </a:fld>
             <a:endParaRPr lang="en-US"/>
           </a:p>
@@ -392,10 +407,9 @@
           <a:lstStyle/>
           <a:p>
             <a:r>
-              <a:rPr lang="en-US" smtClean="0"/>
+              <a:rPr lang="en-US"/>
               <a:t>Click to edit Master title style</a:t>
             </a:r>
-            <a:endParaRPr lang="en-US"/>
           </a:p>
         </p:txBody>
       </p:sp>
@@ -416,38 +430,37 @@
           <a:p>
             <a:pPr lvl="0"/>
             <a:r>
-              <a:rPr lang="en-US" smtClean="0"/>
+              <a:rPr lang="en-US"/>
               <a:t>Click to edit Master text styles</a:t>
             </a:r>
           </a:p>
           <a:p>
             <a:pPr lvl="1"/>
             <a:r>
-              <a:rPr lang="en-US" smtClean="0"/>
+              <a:rPr lang="en-US"/>
               <a:t>Second level</a:t>
             </a:r>
           </a:p>
           <a:p>
             <a:pPr lvl="2"/>
             <a:r>
-              <a:rPr lang="en-US" smtClean="0"/>
+              <a:rPr lang="en-US"/>
               <a:t>Third level</a:t>
             </a:r>
           </a:p>
           <a:p>
             <a:pPr lvl="3"/>
             <a:r>
-              <a:rPr lang="en-US" smtClean="0"/>
+              <a:rPr lang="en-US"/>
               <a:t>Fourth level</a:t>
             </a:r>
           </a:p>
           <a:p>
             <a:pPr lvl="4"/>
             <a:r>
-              <a:rPr lang="en-US" smtClean="0"/>
+              <a:rPr lang="en-US"/>
               <a:t>Fifth level</a:t>
             </a:r>
-            <a:endParaRPr lang="en-US"/>
           </a:p>
         </p:txBody>
       </p:sp>
@@ -468,7 +481,7 @@
           <a:p>
             <a:fld id="{5BCAD085-E8A6-8845-BD4E-CB4CCA059FC4}" type="datetimeFigureOut">
               <a:rPr lang="en-US" smtClean="0"/>
-              <a:t>1/27/13</a:t>
+              <a:t>10/9/2026</a:t>
             </a:fld>
             <a:endParaRPr lang="en-US"/>
           </a:p>
@@ -510,7 +523,7 @@
           <a:p>
             <a:fld id="{C1FF6DA9-008F-8B48-92A6-B652298478BF}" type="slidenum">
               <a:rPr lang="en-US" smtClean="0"/>
-              <a:t>‹#›</a:t>
+              <a:t>‹N°›</a:t>
             </a:fld>
             <a:endParaRPr lang="en-US"/>
           </a:p>
@@ -567,10 +580,9 @@
           <a:lstStyle/>
           <a:p>
             <a:r>
-              <a:rPr lang="en-US" smtClean="0"/>
+              <a:rPr lang="en-US"/>
               <a:t>Click to edit Master title style</a:t>
             </a:r>
-            <a:endParaRPr lang="en-US"/>
           </a:p>
         </p:txBody>
       </p:sp>
@@ -596,38 +608,37 @@
           <a:p>
             <a:pPr lvl="0"/>
             <a:r>
-              <a:rPr lang="en-US" smtClean="0"/>
+              <a:rPr lang="en-US"/>
               <a:t>Click to edit Master text styles</a:t>
             </a:r>
           </a:p>
           <a:p>
             <a:pPr lvl="1"/>
             <a:r>
-              <a:rPr lang="en-US" smtClean="0"/>
+              <a:rPr lang="en-US"/>
               <a:t>Second level</a:t>
             </a:r>
           </a:p>
           <a:p>
             <a:pPr lvl="2"/>
             <a:r>
-              <a:rPr lang="en-US" smtClean="0"/>
+              <a:rPr lang="en-US"/>
               <a:t>Third level</a:t>
             </a:r>
           </a:p>
           <a:p>
             <a:pPr lvl="3"/>
             <a:r>
-              <a:rPr lang="en-US" smtClean="0"/>
+              <a:rPr lang="en-US"/>
               <a:t>Fourth level</a:t>
             </a:r>
           </a:p>
           <a:p>
             <a:pPr lvl="4"/>
             <a:r>
-              <a:rPr lang="en-US" smtClean="0"/>
+              <a:rPr lang="en-US"/>
               <a:t>Fifth level</a:t>
             </a:r>
-            <a:endParaRPr lang="en-US"/>
           </a:p>
         </p:txBody>
       </p:sp>
@@ -648,7 +659,7 @@
           <a:p>
             <a:fld id="{5BCAD085-E8A6-8845-BD4E-CB4CCA059FC4}" type="datetimeFigureOut">
               <a:rPr lang="en-US" smtClean="0"/>
-              <a:t>1/27/13</a:t>
+              <a:t>10/9/2026</a:t>
             </a:fld>
             <a:endParaRPr lang="en-US"/>
           </a:p>
@@ -690,7 +701,7 @@
           <a:p>
             <a:fld id="{C1FF6DA9-008F-8B48-92A6-B652298478BF}" type="slidenum">
               <a:rPr lang="en-US" smtClean="0"/>
-              <a:t>‹#›</a:t>
+              <a:t>‹N°›</a:t>
             </a:fld>
             <a:endParaRPr lang="en-US"/>
           </a:p>
@@ -742,10 +753,9 @@
           <a:lstStyle/>
           <a:p>
             <a:r>
-              <a:rPr lang="en-US" smtClean="0"/>
+              <a:rPr lang="en-US"/>
               <a:t>Click to edit Master title style</a:t>
             </a:r>
-            <a:endParaRPr lang="en-US"/>
           </a:p>
         </p:txBody>
       </p:sp>
@@ -766,38 +776,37 @@
           <a:p>
             <a:pPr lvl="0"/>
             <a:r>
-              <a:rPr lang="en-US" smtClean="0"/>
+              <a:rPr lang="en-US"/>
               <a:t>Click to edit Master text styles</a:t>
             </a:r>
           </a:p>
           <a:p>
             <a:pPr lvl="1"/>
             <a:r>
-              <a:rPr lang="en-US" smtClean="0"/>
+              <a:rPr lang="en-US"/>
               <a:t>Second level</a:t>
             </a:r>
           </a:p>
           <a:p>
             <a:pPr lvl="2"/>
             <a:r>
-              <a:rPr lang="en-US" smtClean="0"/>
+              <a:rPr lang="en-US"/>
               <a:t>Third level</a:t>
             </a:r>
           </a:p>
           <a:p>
             <a:pPr lvl="3"/>
             <a:r>
-              <a:rPr lang="en-US" smtClean="0"/>
+              <a:rPr lang="en-US"/>
               <a:t>Fourth level</a:t>
             </a:r>
           </a:p>
           <a:p>
             <a:pPr lvl="4"/>
             <a:r>
-              <a:rPr lang="en-US" smtClean="0"/>
+              <a:rPr lang="en-US"/>
               <a:t>Fifth level</a:t>
             </a:r>
-            <a:endParaRPr lang="en-US"/>
           </a:p>
         </p:txBody>
       </p:sp>
@@ -818,7 +827,7 @@
           <a:p>
             <a:fld id="{5BCAD085-E8A6-8845-BD4E-CB4CCA059FC4}" type="datetimeFigureOut">
               <a:rPr lang="en-US" smtClean="0"/>
-              <a:t>1/27/13</a:t>
+              <a:t>10/9/2026</a:t>
             </a:fld>
             <a:endParaRPr lang="en-US"/>
           </a:p>
@@ -860,7 +869,7 @@
           <a:p>
             <a:fld id="{C1FF6DA9-008F-8B48-92A6-B652298478BF}" type="slidenum">
               <a:rPr lang="en-US" smtClean="0"/>
-              <a:t>‹#›</a:t>
+              <a:t>‹N°›</a:t>
             </a:fld>
             <a:endParaRPr lang="en-US"/>
           </a:p>
@@ -921,10 +930,9 @@
           </a:lstStyle>
           <a:p>
             <a:r>
-              <a:rPr lang="en-US" smtClean="0"/>
+              <a:rPr lang="en-US"/>
               <a:t>Click to edit Master title style</a:t>
             </a:r>
-            <a:endParaRPr lang="en-US"/>
           </a:p>
         </p:txBody>
       </p:sp>
@@ -1041,7 +1049,7 @@
           <a:p>
             <a:pPr lvl="0"/>
             <a:r>
-              <a:rPr lang="en-US" smtClean="0"/>
+              <a:rPr lang="en-US"/>
               <a:t>Click to edit Master text styles</a:t>
             </a:r>
           </a:p>
@@ -1064,7 +1072,7 @@
           <a:p>
             <a:fld id="{5BCAD085-E8A6-8845-BD4E-CB4CCA059FC4}" type="datetimeFigureOut">
               <a:rPr lang="en-US" smtClean="0"/>
-              <a:t>1/27/13</a:t>
+              <a:t>10/9/2026</a:t>
             </a:fld>
             <a:endParaRPr lang="en-US"/>
           </a:p>
@@ -1106,7 +1114,7 @@
           <a:p>
             <a:fld id="{C1FF6DA9-008F-8B48-92A6-B652298478BF}" type="slidenum">
               <a:rPr lang="en-US" smtClean="0"/>
-              <a:t>‹#›</a:t>
+              <a:t>‹N°›</a:t>
             </a:fld>
             <a:endParaRPr lang="en-US"/>
           </a:p>
@@ -1158,10 +1166,9 @@
           <a:lstStyle/>
           <a:p>
             <a:r>
-              <a:rPr lang="en-US" smtClean="0"/>
+              <a:rPr lang="en-US"/>
               <a:t>Click to edit Master title style</a:t>
             </a:r>
-            <a:endParaRPr lang="en-US"/>
           </a:p>
         </p:txBody>
       </p:sp>
@@ -1215,38 +1222,37 @@
           <a:p>
             <a:pPr lvl="0"/>
             <a:r>
-              <a:rPr lang="en-US" smtClean="0"/>
+              <a:rPr lang="en-US"/>
               <a:t>Click to edit Master text styles</a:t>
             </a:r>
           </a:p>
           <a:p>
             <a:pPr lvl="1"/>
             <a:r>
-              <a:rPr lang="en-US" smtClean="0"/>
+              <a:rPr lang="en-US"/>
               <a:t>Second level</a:t>
             </a:r>
           </a:p>
           <a:p>
             <a:pPr lvl="2"/>
             <a:r>
-              <a:rPr lang="en-US" smtClean="0"/>
+              <a:rPr lang="en-US"/>
               <a:t>Third level</a:t>
             </a:r>
           </a:p>
           <a:p>
             <a:pPr lvl="3"/>
             <a:r>
-              <a:rPr lang="en-US" smtClean="0"/>
+              <a:rPr lang="en-US"/>
               <a:t>Fourth level</a:t>
             </a:r>
           </a:p>
           <a:p>
             <a:pPr lvl="4"/>
             <a:r>
-              <a:rPr lang="en-US" smtClean="0"/>
+              <a:rPr lang="en-US"/>
               <a:t>Fifth level</a:t>
             </a:r>
-            <a:endParaRPr lang="en-US"/>
           </a:p>
         </p:txBody>
       </p:sp>
@@ -1300,38 +1306,37 @@
           <a:p>
             <a:pPr lvl="0"/>
             <a:r>
-              <a:rPr lang="en-US" smtClean="0"/>
+              <a:rPr lang="en-US"/>
               <a:t>Click to edit Master text styles</a:t>
             </a:r>
           </a:p>
           <a:p>
             <a:pPr lvl="1"/>
             <a:r>
-              <a:rPr lang="en-US" smtClean="0"/>
+              <a:rPr lang="en-US"/>
               <a:t>Second level</a:t>
             </a:r>
           </a:p>
           <a:p>
             <a:pPr lvl="2"/>
             <a:r>
-              <a:rPr lang="en-US" smtClean="0"/>
+              <a:rPr lang="en-US"/>
               <a:t>Third level</a:t>
             </a:r>
           </a:p>
           <a:p>
             <a:pPr lvl="3"/>
             <a:r>
-              <a:rPr lang="en-US" smtClean="0"/>
+              <a:rPr lang="en-US"/>
               <a:t>Fourth level</a:t>
             </a:r>
           </a:p>
           <a:p>
             <a:pPr lvl="4"/>
             <a:r>
-              <a:rPr lang="en-US" smtClean="0"/>
+              <a:rPr lang="en-US"/>
               <a:t>Fifth level</a:t>
             </a:r>
-            <a:endParaRPr lang="en-US"/>
           </a:p>
         </p:txBody>
       </p:sp>
@@ -1352,7 +1357,7 @@
           <a:p>
             <a:fld id="{5BCAD085-E8A6-8845-BD4E-CB4CCA059FC4}" type="datetimeFigureOut">
               <a:rPr lang="en-US" smtClean="0"/>
-              <a:t>1/27/13</a:t>
+              <a:t>10/9/2026</a:t>
             </a:fld>
             <a:endParaRPr lang="en-US"/>
           </a:p>
@@ -1394,7 +1399,7 @@
           <a:p>
             <a:fld id="{C1FF6DA9-008F-8B48-92A6-B652298478BF}" type="slidenum">
               <a:rPr lang="en-US" smtClean="0"/>
-              <a:t>‹#›</a:t>
+              <a:t>‹N°›</a:t>
             </a:fld>
             <a:endParaRPr lang="en-US"/>
           </a:p>
@@ -1450,10 +1455,9 @@
           </a:lstStyle>
           <a:p>
             <a:r>
-              <a:rPr lang="en-US" smtClean="0"/>
+              <a:rPr lang="en-US"/>
               <a:t>Click to edit Master title style</a:t>
             </a:r>
-            <a:endParaRPr lang="en-US"/>
           </a:p>
         </p:txBody>
       </p:sp>
@@ -1516,7 +1520,7 @@
           <a:p>
             <a:pPr lvl="0"/>
             <a:r>
-              <a:rPr lang="en-US" smtClean="0"/>
+              <a:rPr lang="en-US"/>
               <a:t>Click to edit Master text styles</a:t>
             </a:r>
           </a:p>
@@ -1572,38 +1576,37 @@
           <a:p>
             <a:pPr lvl="0"/>
             <a:r>
-              <a:rPr lang="en-US" smtClean="0"/>
+              <a:rPr lang="en-US"/>
               <a:t>Click to edit Master text styles</a:t>
             </a:r>
           </a:p>
           <a:p>
             <a:pPr lvl="1"/>
             <a:r>
-              <a:rPr lang="en-US" smtClean="0"/>
+              <a:rPr lang="en-US"/>
               <a:t>Second level</a:t>
             </a:r>
           </a:p>
           <a:p>
             <a:pPr lvl="2"/>
             <a:r>
-              <a:rPr lang="en-US" smtClean="0"/>
+              <a:rPr lang="en-US"/>
               <a:t>Third level</a:t>
             </a:r>
           </a:p>
           <a:p>
             <a:pPr lvl="3"/>
             <a:r>
-              <a:rPr lang="en-US" smtClean="0"/>
+              <a:rPr lang="en-US"/>
               <a:t>Fourth level</a:t>
             </a:r>
           </a:p>
           <a:p>
             <a:pPr lvl="4"/>
             <a:r>
-              <a:rPr lang="en-US" smtClean="0"/>
+              <a:rPr lang="en-US"/>
               <a:t>Fifth level</a:t>
             </a:r>
-            <a:endParaRPr lang="en-US"/>
           </a:p>
         </p:txBody>
       </p:sp>
@@ -1666,7 +1669,7 @@
           <a:p>
             <a:pPr lvl="0"/>
             <a:r>
-              <a:rPr lang="en-US" smtClean="0"/>
+              <a:rPr lang="en-US"/>
               <a:t>Click to edit Master text styles</a:t>
             </a:r>
           </a:p>
@@ -1722,38 +1725,37 @@
           <a:p>
             <a:pPr lvl="0"/>
             <a:r>
-              <a:rPr lang="en-US" smtClean="0"/>
+              <a:rPr lang="en-US"/>
               <a:t>Click to edit Master text styles</a:t>
             </a:r>
           </a:p>
           <a:p>
             <a:pPr lvl="1"/>
             <a:r>
-              <a:rPr lang="en-US" smtClean="0"/>
+              <a:rPr lang="en-US"/>
               <a:t>Second level</a:t>
             </a:r>
           </a:p>
           <a:p>
             <a:pPr lvl="2"/>
             <a:r>
-              <a:rPr lang="en-US" smtClean="0"/>
+              <a:rPr lang="en-US"/>
               <a:t>Third level</a:t>
             </a:r>
           </a:p>
           <a:p>
             <a:pPr lvl="3"/>
             <a:r>
-              <a:rPr lang="en-US" smtClean="0"/>
+              <a:rPr lang="en-US"/>
               <a:t>Fourth level</a:t>
             </a:r>
           </a:p>
           <a:p>
             <a:pPr lvl="4"/>
             <a:r>
-              <a:rPr lang="en-US" smtClean="0"/>
+              <a:rPr lang="en-US"/>
               <a:t>Fifth level</a:t>
             </a:r>
-            <a:endParaRPr lang="en-US"/>
           </a:p>
         </p:txBody>
       </p:sp>
@@ -1774,7 +1776,7 @@
           <a:p>
             <a:fld id="{5BCAD085-E8A6-8845-BD4E-CB4CCA059FC4}" type="datetimeFigureOut">
               <a:rPr lang="en-US" smtClean="0"/>
-              <a:t>1/27/13</a:t>
+              <a:t>10/9/2026</a:t>
             </a:fld>
             <a:endParaRPr lang="en-US"/>
           </a:p>
@@ -1816,7 +1818,7 @@
           <a:p>
             <a:fld id="{C1FF6DA9-008F-8B48-92A6-B652298478BF}" type="slidenum">
               <a:rPr lang="en-US" smtClean="0"/>
-              <a:t>‹#›</a:t>
+              <a:t>‹N°›</a:t>
             </a:fld>
             <a:endParaRPr lang="en-US"/>
           </a:p>
@@ -1868,10 +1870,9 @@
           <a:lstStyle/>
           <a:p>
             <a:r>
-              <a:rPr lang="en-US" smtClean="0"/>
+              <a:rPr lang="en-US"/>
               <a:t>Click to edit Master title style</a:t>
             </a:r>
-            <a:endParaRPr lang="en-US"/>
           </a:p>
         </p:txBody>
       </p:sp>
@@ -1892,7 +1893,7 @@
           <a:p>
             <a:fld id="{5BCAD085-E8A6-8845-BD4E-CB4CCA059FC4}" type="datetimeFigureOut">
               <a:rPr lang="en-US" smtClean="0"/>
-              <a:t>1/27/13</a:t>
+              <a:t>10/9/2026</a:t>
             </a:fld>
             <a:endParaRPr lang="en-US"/>
           </a:p>
@@ -1934,7 +1935,7 @@
           <a:p>
             <a:fld id="{C1FF6DA9-008F-8B48-92A6-B652298478BF}" type="slidenum">
               <a:rPr lang="en-US" smtClean="0"/>
-              <a:t>‹#›</a:t>
+              <a:t>‹N°›</a:t>
             </a:fld>
             <a:endParaRPr lang="en-US"/>
           </a:p>
@@ -1987,7 +1988,7 @@
           <a:p>
             <a:fld id="{5BCAD085-E8A6-8845-BD4E-CB4CCA059FC4}" type="datetimeFigureOut">
               <a:rPr lang="en-US" smtClean="0"/>
-              <a:t>1/27/13</a:t>
+              <a:t>10/9/2026</a:t>
             </a:fld>
             <a:endParaRPr lang="en-US"/>
           </a:p>
@@ -2029,7 +2030,7 @@
           <a:p>
             <a:fld id="{C1FF6DA9-008F-8B48-92A6-B652298478BF}" type="slidenum">
               <a:rPr lang="en-US" smtClean="0"/>
-              <a:t>‹#›</a:t>
+              <a:t>‹N°›</a:t>
             </a:fld>
             <a:endParaRPr lang="en-US"/>
           </a:p>
@@ -2090,10 +2091,9 @@
           </a:lstStyle>
           <a:p>
             <a:r>
-              <a:rPr lang="en-US" smtClean="0"/>
+              <a:rPr lang="en-US"/>
               <a:t>Click to edit Master title style</a:t>
             </a:r>
-            <a:endParaRPr lang="en-US"/>
           </a:p>
         </p:txBody>
       </p:sp>
@@ -2147,38 +2147,37 @@
           <a:p>
             <a:pPr lvl="0"/>
             <a:r>
-              <a:rPr lang="en-US" smtClean="0"/>
+              <a:rPr lang="en-US"/>
               <a:t>Click to edit Master text styles</a:t>
             </a:r>
           </a:p>
           <a:p>
             <a:pPr lvl="1"/>
             <a:r>
-              <a:rPr lang="en-US" smtClean="0"/>
+              <a:rPr lang="en-US"/>
               <a:t>Second level</a:t>
             </a:r>
           </a:p>
           <a:p>
             <a:pPr lvl="2"/>
             <a:r>
-              <a:rPr lang="en-US" smtClean="0"/>
+              <a:rPr lang="en-US"/>
               <a:t>Third level</a:t>
             </a:r>
           </a:p>
           <a:p>
             <a:pPr lvl="3"/>
             <a:r>
-              <a:rPr lang="en-US" smtClean="0"/>
+              <a:rPr lang="en-US"/>
               <a:t>Fourth level</a:t>
             </a:r>
           </a:p>
           <a:p>
             <a:pPr lvl="4"/>
             <a:r>
-              <a:rPr lang="en-US" smtClean="0"/>
+              <a:rPr lang="en-US"/>
               <a:t>Fifth level</a:t>
             </a:r>
-            <a:endParaRPr lang="en-US"/>
           </a:p>
         </p:txBody>
       </p:sp>
@@ -2241,7 +2240,7 @@
           <a:p>
             <a:pPr lvl="0"/>
             <a:r>
-              <a:rPr lang="en-US" smtClean="0"/>
+              <a:rPr lang="en-US"/>
               <a:t>Click to edit Master text styles</a:t>
             </a:r>
           </a:p>
@@ -2264,7 +2263,7 @@
           <a:p>
             <a:fld id="{5BCAD085-E8A6-8845-BD4E-CB4CCA059FC4}" type="datetimeFigureOut">
               <a:rPr lang="en-US" smtClean="0"/>
-              <a:t>1/27/13</a:t>
+              <a:t>10/9/2026</a:t>
             </a:fld>
             <a:endParaRPr lang="en-US"/>
           </a:p>
@@ -2306,7 +2305,7 @@
           <a:p>
             <a:fld id="{C1FF6DA9-008F-8B48-92A6-B652298478BF}" type="slidenum">
               <a:rPr lang="en-US" smtClean="0"/>
-              <a:t>‹#›</a:t>
+              <a:t>‹N°›</a:t>
             </a:fld>
             <a:endParaRPr lang="en-US"/>
           </a:p>
@@ -2367,10 +2366,9 @@
           </a:lstStyle>
           <a:p>
             <a:r>
-              <a:rPr lang="en-US" smtClean="0"/>
+              <a:rPr lang="en-US"/>
               <a:t>Click to edit Master title style</a:t>
             </a:r>
-            <a:endParaRPr lang="en-US"/>
           </a:p>
         </p:txBody>
       </p:sp>
@@ -2494,7 +2492,7 @@
           <a:p>
             <a:pPr lvl="0"/>
             <a:r>
-              <a:rPr lang="en-US" smtClean="0"/>
+              <a:rPr lang="en-US"/>
               <a:t>Click to edit Master text styles</a:t>
             </a:r>
           </a:p>
@@ -2517,7 +2515,7 @@
           <a:p>
             <a:fld id="{5BCAD085-E8A6-8845-BD4E-CB4CCA059FC4}" type="datetimeFigureOut">
               <a:rPr lang="en-US" smtClean="0"/>
-              <a:t>1/27/13</a:t>
+              <a:t>10/9/2026</a:t>
             </a:fld>
             <a:endParaRPr lang="en-US"/>
           </a:p>
@@ -2559,7 +2557,7 @@
           <a:p>
             <a:fld id="{C1FF6DA9-008F-8B48-92A6-B652298478BF}" type="slidenum">
               <a:rPr lang="en-US" smtClean="0"/>
-              <a:t>‹#›</a:t>
+              <a:t>‹N°›</a:t>
             </a:fld>
             <a:endParaRPr lang="en-US"/>
           </a:p>
@@ -2626,10 +2624,9 @@
           <a:lstStyle/>
           <a:p>
             <a:r>
-              <a:rPr lang="en-US" smtClean="0"/>
+              <a:rPr lang="en-US"/>
               <a:t>Click to edit Master title style</a:t>
             </a:r>
-            <a:endParaRPr lang="en-US"/>
           </a:p>
         </p:txBody>
       </p:sp>
@@ -2660,38 +2657,37 @@
           <a:p>
             <a:pPr lvl="0"/>
             <a:r>
-              <a:rPr lang="en-US" smtClean="0"/>
+              <a:rPr lang="en-US"/>
               <a:t>Click to edit Master text styles</a:t>
             </a:r>
           </a:p>
           <a:p>
             <a:pPr lvl="1"/>
             <a:r>
-              <a:rPr lang="en-US" smtClean="0"/>
+              <a:rPr lang="en-US"/>
               <a:t>Second level</a:t>
             </a:r>
           </a:p>
           <a:p>
             <a:pPr lvl="2"/>
             <a:r>
-              <a:rPr lang="en-US" smtClean="0"/>
+              <a:rPr lang="en-US"/>
               <a:t>Third level</a:t>
             </a:r>
           </a:p>
           <a:p>
             <a:pPr lvl="3"/>
             <a:r>
-              <a:rPr lang="en-US" smtClean="0"/>
+              <a:rPr lang="en-US"/>
               <a:t>Fourth level</a:t>
             </a:r>
           </a:p>
           <a:p>
             <a:pPr lvl="4"/>
             <a:r>
-              <a:rPr lang="en-US" smtClean="0"/>
+              <a:rPr lang="en-US"/>
               <a:t>Fifth level</a:t>
             </a:r>
-            <a:endParaRPr lang="en-US"/>
           </a:p>
         </p:txBody>
       </p:sp>
@@ -2730,7 +2726,7 @@
           <a:p>
             <a:fld id="{5BCAD085-E8A6-8845-BD4E-CB4CCA059FC4}" type="datetimeFigureOut">
               <a:rPr lang="en-US" smtClean="0"/>
-              <a:t>1/27/13</a:t>
+              <a:t>10/9/2026</a:t>
             </a:fld>
             <a:endParaRPr lang="en-US"/>
           </a:p>
@@ -2808,7 +2804,7 @@
           <a:p>
             <a:fld id="{C1FF6DA9-008F-8B48-92A6-B652298478BF}" type="slidenum">
               <a:rPr lang="en-US" smtClean="0"/>
-              <a:t>‹#›</a:t>
+              <a:t>‹N°›</a:t>
             </a:fld>
             <a:endParaRPr lang="en-US"/>
           </a:p>
@@ -3089,7 +3085,7 @@
 </file>
 
 <file path=ppt/slides/slide1.xml><?xml version="1.0" encoding="utf-8"?>
-<p:sld xmlns:a="http://schemas.openxmlformats.org/drawingml/2006/main" xmlns:p="http://schemas.openxmlformats.org/presentationml/2006/main" xmlns:r="http://schemas.openxmlformats.org/officeDocument/2006/relationships">
+<p:sld xmlns:a="http://schemas.openxmlformats.org/drawingml/2006/main" xmlns:r="http://schemas.openxmlformats.org/officeDocument/2006/relationships" xmlns:p="http://schemas.openxmlformats.org/presentationml/2006/main">
   <p:cSld>
     <p:spTree>
       <p:nvGrpSpPr>
@@ -3097,7 +3093,14 @@
         <p:cNvGrpSpPr/>
         <p:nvPr/>
       </p:nvGrpSpPr>
-      <p:grpSpPr/>
+      <p:grpSpPr>
+        <a:xfrm>
+          <a:off x="0" y="0"/>
+          <a:ext cx="0" cy="0"/>
+          <a:chOff x="0" y="0"/>
+          <a:chExt cx="0" cy="0"/>
+        </a:xfrm>
+      </p:grpSpPr>
       <p:sp>
         <p:nvSpPr>
           <p:cNvPr id="2" name="TextBox 1"/>
@@ -3185,10 +3188,7 @@
             </a:r>
           </a:p>
           <a:p>
-            <a:r>
-              <a:rPr sz="1800" b="0"/>
-              <a:t/>
-            </a:r>
+            <a:endParaRPr sz="1800" b="0"/>
           </a:p>
           <a:p>
             <a:r>
@@ -3207,7 +3207,7 @@
 </file>
 
 <file path=ppt/slides/slide10.xml><?xml version="1.0" encoding="utf-8"?>
-<p:sld xmlns:a="http://schemas.openxmlformats.org/drawingml/2006/main" xmlns:p="http://schemas.openxmlformats.org/presentationml/2006/main" xmlns:r="http://schemas.openxmlformats.org/officeDocument/2006/relationships">
+<p:sld xmlns:a="http://schemas.openxmlformats.org/drawingml/2006/main" xmlns:r="http://schemas.openxmlformats.org/officeDocument/2006/relationships" xmlns:p="http://schemas.openxmlformats.org/presentationml/2006/main">
   <p:cSld>
     <p:spTree>
       <p:nvGrpSpPr>
@@ -3215,7 +3215,14 @@
         <p:cNvGrpSpPr/>
         <p:nvPr/>
       </p:nvGrpSpPr>
-      <p:grpSpPr/>
+      <p:grpSpPr>
+        <a:xfrm>
+          <a:off x="0" y="0"/>
+          <a:ext cx="0" cy="0"/>
+          <a:chOff x="0" y="0"/>
+          <a:chExt cx="0" cy="0"/>
+        </a:xfrm>
+      </p:grpSpPr>
       <p:sp>
         <p:nvSpPr>
           <p:cNvPr id="2" name="TextBox 1"/>
@@ -3284,7 +3291,7 @@
 </file>
 
 <file path=ppt/slides/slide11.xml><?xml version="1.0" encoding="utf-8"?>
-<p:sld xmlns:a="http://schemas.openxmlformats.org/drawingml/2006/main" xmlns:p="http://schemas.openxmlformats.org/presentationml/2006/main" xmlns:r="http://schemas.openxmlformats.org/officeDocument/2006/relationships">
+<p:sld xmlns:a="http://schemas.openxmlformats.org/drawingml/2006/main" xmlns:r="http://schemas.openxmlformats.org/officeDocument/2006/relationships" xmlns:p="http://schemas.openxmlformats.org/presentationml/2006/main">
   <p:cSld>
     <p:spTree>
       <p:nvGrpSpPr>
@@ -3292,7 +3299,14 @@
         <p:cNvGrpSpPr/>
         <p:nvPr/>
       </p:nvGrpSpPr>
-      <p:grpSpPr/>
+      <p:grpSpPr>
+        <a:xfrm>
+          <a:off x="0" y="0"/>
+          <a:ext cx="0" cy="0"/>
+          <a:chOff x="0" y="0"/>
+          <a:chExt cx="0" cy="0"/>
+        </a:xfrm>
+      </p:grpSpPr>
       <p:sp>
         <p:nvSpPr>
           <p:cNvPr id="2" name="TextBox 1"/>
@@ -3322,36 +3336,742 @@
           </a:p>
         </p:txBody>
       </p:sp>
-      <p:pic>
-        <p:nvPicPr>
-          <p:cNvPr id="3" name="Picture 2" descr="toc-physical.png"/>
-          <p:cNvPicPr>
-            <a:picLocks noChangeAspect="1"/>
-          </p:cNvPicPr>
-          <p:nvPr/>
-        </p:nvPicPr>
-        <p:blipFill>
-          <a:blip r:embed="rId2">
+      <p:sp>
+        <p:nvSpPr>
+          <p:cNvPr id="5" name="Forme libre : forme 4">
             <a:extLst>
-              <a:ext uri="{96DAC541-7B7A-43D3-8B79-37D633B846F1}">
-                <asvg:svgBlip xmlns:asvg="http://schemas.microsoft.com/office/drawing/2016/SVG/main" r:embed="rId3"/>
+              <a:ext uri="{FF2B5EF4-FFF2-40B4-BE49-F238E27FC236}">
+                <a16:creationId xmlns:a16="http://schemas.microsoft.com/office/drawing/2014/main" id="{54AC4A84-9830-0021-8151-C1682113CCFE}"/>
               </a:ext>
             </a:extLst>
-          </a:blip>
-          <a:stretch>
-            <a:fillRect/>
-          </a:stretch>
-        </p:blipFill>
-        <p:spPr>
-          <a:xfrm>
-            <a:off x="3279495" y="1280160"/>
-            <a:ext cx="5632704" cy="5120640"/>
-          </a:xfrm>
-          <a:prstGeom prst="rect">
+          </p:cNvPr>
+          <p:cNvSpPr/>
+          <p:nvPr/>
+        </p:nvSpPr>
+        <p:spPr>
+          <a:xfrm>
+            <a:off x="3740352" y="1587398"/>
+            <a:ext cx="4710988" cy="4710988"/>
+          </a:xfrm>
+          <a:custGeom>
             <a:avLst/>
-          </a:prstGeom>
-        </p:spPr>
-      </p:pic>
+            <a:gdLst>
+              <a:gd name="connsiteX0" fmla="*/ 4710989 w 4710988"/>
+              <a:gd name="connsiteY0" fmla="*/ 2355495 h 4710988"/>
+              <a:gd name="connsiteX1" fmla="*/ 2355495 w 4710988"/>
+              <a:gd name="connsiteY1" fmla="*/ 4710989 h 4710988"/>
+              <a:gd name="connsiteX2" fmla="*/ 0 w 4710988"/>
+              <a:gd name="connsiteY2" fmla="*/ 2355495 h 4710988"/>
+              <a:gd name="connsiteX3" fmla="*/ 2355495 w 4710988"/>
+              <a:gd name="connsiteY3" fmla="*/ 0 h 4710988"/>
+              <a:gd name="connsiteX4" fmla="*/ 4710989 w 4710988"/>
+              <a:gd name="connsiteY4" fmla="*/ 2355495 h 4710988"/>
+            </a:gdLst>
+            <a:ahLst/>
+            <a:cxnLst>
+              <a:cxn ang="0">
+                <a:pos x="connsiteX0" y="connsiteY0"/>
+              </a:cxn>
+              <a:cxn ang="0">
+                <a:pos x="connsiteX1" y="connsiteY1"/>
+              </a:cxn>
+              <a:cxn ang="0">
+                <a:pos x="connsiteX2" y="connsiteY2"/>
+              </a:cxn>
+              <a:cxn ang="0">
+                <a:pos x="connsiteX3" y="connsiteY3"/>
+              </a:cxn>
+              <a:cxn ang="0">
+                <a:pos x="connsiteX4" y="connsiteY4"/>
+              </a:cxn>
+            </a:cxnLst>
+            <a:rect l="l" t="t" r="r" b="b"/>
+            <a:pathLst>
+              <a:path w="4710988" h="4710988">
+                <a:moveTo>
+                  <a:pt x="4710989" y="2355495"/>
+                </a:moveTo>
+                <a:cubicBezTo>
+                  <a:pt x="4710989" y="3656398"/>
+                  <a:pt x="3656398" y="4710989"/>
+                  <a:pt x="2355495" y="4710989"/>
+                </a:cubicBezTo>
+                <a:cubicBezTo>
+                  <a:pt x="1054591" y="4710989"/>
+                  <a:pt x="0" y="3656398"/>
+                  <a:pt x="0" y="2355495"/>
+                </a:cubicBezTo>
+                <a:cubicBezTo>
+                  <a:pt x="0" y="1054591"/>
+                  <a:pt x="1054591" y="0"/>
+                  <a:pt x="2355495" y="0"/>
+                </a:cubicBezTo>
+                <a:cubicBezTo>
+                  <a:pt x="3656398" y="0"/>
+                  <a:pt x="4710989" y="1054591"/>
+                  <a:pt x="4710989" y="2355495"/>
+                </a:cubicBezTo>
+                <a:close/>
+              </a:path>
+            </a:pathLst>
+          </a:custGeom>
+          <a:solidFill>
+            <a:srgbClr val="E9EEF4"/>
+          </a:solidFill>
+          <a:ln w="51175" cap="flat">
+            <a:noFill/>
+            <a:prstDash val="solid"/>
+            <a:miter/>
+          </a:ln>
+        </p:spPr>
+        <p:txBody>
+          <a:bodyPr rtlCol="0" anchor="ctr"/>
+          <a:lstStyle/>
+          <a:p>
+            <a:endParaRPr lang="fr-FR"/>
+          </a:p>
+        </p:txBody>
+      </p:sp>
+      <p:sp>
+        <p:nvSpPr>
+          <p:cNvPr id="6" name="Forme libre : forme 5">
+            <a:extLst>
+              <a:ext uri="{FF2B5EF4-FFF2-40B4-BE49-F238E27FC236}">
+                <a16:creationId xmlns:a16="http://schemas.microsoft.com/office/drawing/2014/main" id="{FAD0EC8D-34CE-62A6-E5B1-36D36321DF44}"/>
+              </a:ext>
+            </a:extLst>
+          </p:cNvPr>
+          <p:cNvSpPr/>
+          <p:nvPr/>
+        </p:nvSpPr>
+        <p:spPr>
+          <a:xfrm>
+            <a:off x="5327751" y="1997049"/>
+            <a:ext cx="1244796" cy="3891686"/>
+          </a:xfrm>
+          <a:custGeom>
+            <a:avLst/>
+            <a:gdLst>
+              <a:gd name="connsiteX0" fmla="*/ 0 w 1244796"/>
+              <a:gd name="connsiteY0" fmla="*/ 0 h 3891686"/>
+              <a:gd name="connsiteX1" fmla="*/ 1126541 w 1244796"/>
+              <a:gd name="connsiteY1" fmla="*/ 0 h 3891686"/>
+              <a:gd name="connsiteX2" fmla="*/ 1126541 w 1244796"/>
+              <a:gd name="connsiteY2" fmla="*/ 1945843 h 3891686"/>
+              <a:gd name="connsiteX3" fmla="*/ 1126541 w 1244796"/>
+              <a:gd name="connsiteY3" fmla="*/ 3891687 h 3891686"/>
+              <a:gd name="connsiteX4" fmla="*/ 0 w 1244796"/>
+              <a:gd name="connsiteY4" fmla="*/ 3891687 h 3891686"/>
+            </a:gdLst>
+            <a:ahLst/>
+            <a:cxnLst>
+              <a:cxn ang="0">
+                <a:pos x="connsiteX0" y="connsiteY0"/>
+              </a:cxn>
+              <a:cxn ang="0">
+                <a:pos x="connsiteX1" y="connsiteY1"/>
+              </a:cxn>
+              <a:cxn ang="0">
+                <a:pos x="connsiteX2" y="connsiteY2"/>
+              </a:cxn>
+              <a:cxn ang="0">
+                <a:pos x="connsiteX3" y="connsiteY3"/>
+              </a:cxn>
+              <a:cxn ang="0">
+                <a:pos x="connsiteX4" y="connsiteY4"/>
+              </a:cxn>
+            </a:cxnLst>
+            <a:rect l="l" t="t" r="r" b="b"/>
+            <a:pathLst>
+              <a:path w="1244796" h="3891686">
+                <a:moveTo>
+                  <a:pt x="0" y="0"/>
+                </a:moveTo>
+                <a:lnTo>
+                  <a:pt x="1126541" y="0"/>
+                </a:lnTo>
+                <a:cubicBezTo>
+                  <a:pt x="716890" y="614477"/>
+                  <a:pt x="1536192" y="1331366"/>
+                  <a:pt x="1126541" y="1945843"/>
+                </a:cubicBezTo>
+                <a:cubicBezTo>
+                  <a:pt x="716890" y="2560320"/>
+                  <a:pt x="1536192" y="3277210"/>
+                  <a:pt x="1126541" y="3891687"/>
+                </a:cubicBezTo>
+                <a:lnTo>
+                  <a:pt x="0" y="3891687"/>
+                </a:lnTo>
+                <a:close/>
+              </a:path>
+            </a:pathLst>
+          </a:custGeom>
+          <a:solidFill>
+            <a:srgbClr val="BFBFBF"/>
+          </a:solidFill>
+          <a:ln w="51175" cap="flat">
+            <a:noFill/>
+            <a:prstDash val="solid"/>
+            <a:miter/>
+          </a:ln>
+        </p:spPr>
+        <p:txBody>
+          <a:bodyPr rtlCol="0" anchor="ctr"/>
+          <a:lstStyle/>
+          <a:p>
+            <a:endParaRPr lang="fr-FR"/>
+          </a:p>
+        </p:txBody>
+      </p:sp>
+      <p:sp>
+        <p:nvSpPr>
+          <p:cNvPr id="7" name="Forme libre : forme 6">
+            <a:extLst>
+              <a:ext uri="{FF2B5EF4-FFF2-40B4-BE49-F238E27FC236}">
+                <a16:creationId xmlns:a16="http://schemas.microsoft.com/office/drawing/2014/main" id="{A71A952B-2DD5-1356-8D01-7D5B844A7E7B}"/>
+              </a:ext>
+            </a:extLst>
+          </p:cNvPr>
+          <p:cNvSpPr/>
+          <p:nvPr/>
+        </p:nvSpPr>
+        <p:spPr>
+          <a:xfrm>
+            <a:off x="6336035" y="1997049"/>
+            <a:ext cx="1039971" cy="3891686"/>
+          </a:xfrm>
+          <a:custGeom>
+            <a:avLst/>
+            <a:gdLst>
+              <a:gd name="connsiteX0" fmla="*/ 118256 w 1039971"/>
+              <a:gd name="connsiteY0" fmla="*/ 0 h 3891686"/>
+              <a:gd name="connsiteX1" fmla="*/ 1039971 w 1039971"/>
+              <a:gd name="connsiteY1" fmla="*/ 0 h 3891686"/>
+              <a:gd name="connsiteX2" fmla="*/ 1039971 w 1039971"/>
+              <a:gd name="connsiteY2" fmla="*/ 3891687 h 3891686"/>
+              <a:gd name="connsiteX3" fmla="*/ 118256 w 1039971"/>
+              <a:gd name="connsiteY3" fmla="*/ 3891687 h 3891686"/>
+              <a:gd name="connsiteX4" fmla="*/ 118256 w 1039971"/>
+              <a:gd name="connsiteY4" fmla="*/ 1945843 h 3891686"/>
+              <a:gd name="connsiteX5" fmla="*/ 118256 w 1039971"/>
+              <a:gd name="connsiteY5" fmla="*/ 0 h 3891686"/>
+            </a:gdLst>
+            <a:ahLst/>
+            <a:cxnLst>
+              <a:cxn ang="0">
+                <a:pos x="connsiteX0" y="connsiteY0"/>
+              </a:cxn>
+              <a:cxn ang="0">
+                <a:pos x="connsiteX1" y="connsiteY1"/>
+              </a:cxn>
+              <a:cxn ang="0">
+                <a:pos x="connsiteX2" y="connsiteY2"/>
+              </a:cxn>
+              <a:cxn ang="0">
+                <a:pos x="connsiteX3" y="connsiteY3"/>
+              </a:cxn>
+              <a:cxn ang="0">
+                <a:pos x="connsiteX4" y="connsiteY4"/>
+              </a:cxn>
+              <a:cxn ang="0">
+                <a:pos x="connsiteX5" y="connsiteY5"/>
+              </a:cxn>
+            </a:cxnLst>
+            <a:rect l="l" t="t" r="r" b="b"/>
+            <a:pathLst>
+              <a:path w="1039971" h="3891686">
+                <a:moveTo>
+                  <a:pt x="118256" y="0"/>
+                </a:moveTo>
+                <a:lnTo>
+                  <a:pt x="1039971" y="0"/>
+                </a:lnTo>
+                <a:lnTo>
+                  <a:pt x="1039971" y="3891687"/>
+                </a:lnTo>
+                <a:lnTo>
+                  <a:pt x="118256" y="3891687"/>
+                </a:lnTo>
+                <a:cubicBezTo>
+                  <a:pt x="527907" y="3277210"/>
+                  <a:pt x="-291395" y="2560320"/>
+                  <a:pt x="118256" y="1945843"/>
+                </a:cubicBezTo>
+                <a:cubicBezTo>
+                  <a:pt x="527907" y="1331366"/>
+                  <a:pt x="-291395" y="614477"/>
+                  <a:pt x="118256" y="0"/>
+                </a:cubicBezTo>
+                <a:close/>
+              </a:path>
+            </a:pathLst>
+          </a:custGeom>
+          <a:solidFill>
+            <a:srgbClr val="FEF6B6"/>
+          </a:solidFill>
+          <a:ln w="51175" cap="flat">
+            <a:noFill/>
+            <a:prstDash val="solid"/>
+            <a:miter/>
+          </a:ln>
+        </p:spPr>
+        <p:txBody>
+          <a:bodyPr rtlCol="0" anchor="ctr"/>
+          <a:lstStyle/>
+          <a:p>
+            <a:endParaRPr lang="fr-FR"/>
+          </a:p>
+        </p:txBody>
+      </p:sp>
+      <p:sp>
+        <p:nvSpPr>
+          <p:cNvPr id="8" name="Forme libre : forme 7">
+            <a:extLst>
+              <a:ext uri="{FF2B5EF4-FFF2-40B4-BE49-F238E27FC236}">
+                <a16:creationId xmlns:a16="http://schemas.microsoft.com/office/drawing/2014/main" id="{1959A8B1-73CB-C5BE-48C9-538F74DB1EE6}"/>
+              </a:ext>
+            </a:extLst>
+          </p:cNvPr>
+          <p:cNvSpPr/>
+          <p:nvPr/>
+        </p:nvSpPr>
+        <p:spPr>
+          <a:xfrm>
+            <a:off x="6336035" y="1997049"/>
+            <a:ext cx="236512" cy="3891686"/>
+          </a:xfrm>
+          <a:custGeom>
+            <a:avLst/>
+            <a:gdLst>
+              <a:gd name="connsiteX0" fmla="*/ 118256 w 236512"/>
+              <a:gd name="connsiteY0" fmla="*/ 0 h 3891686"/>
+              <a:gd name="connsiteX1" fmla="*/ 118256 w 236512"/>
+              <a:gd name="connsiteY1" fmla="*/ 1945843 h 3891686"/>
+              <a:gd name="connsiteX2" fmla="*/ 118256 w 236512"/>
+              <a:gd name="connsiteY2" fmla="*/ 3891687 h 3891686"/>
+            </a:gdLst>
+            <a:ahLst/>
+            <a:cxnLst>
+              <a:cxn ang="0">
+                <a:pos x="connsiteX0" y="connsiteY0"/>
+              </a:cxn>
+              <a:cxn ang="0">
+                <a:pos x="connsiteX1" y="connsiteY1"/>
+              </a:cxn>
+              <a:cxn ang="0">
+                <a:pos x="connsiteX2" y="connsiteY2"/>
+              </a:cxn>
+            </a:cxnLst>
+            <a:rect l="l" t="t" r="r" b="b"/>
+            <a:pathLst>
+              <a:path w="236512" h="3891686">
+                <a:moveTo>
+                  <a:pt x="118256" y="0"/>
+                </a:moveTo>
+                <a:cubicBezTo>
+                  <a:pt x="-291395" y="614477"/>
+                  <a:pt x="527907" y="1331366"/>
+                  <a:pt x="118256" y="1945843"/>
+                </a:cubicBezTo>
+                <a:cubicBezTo>
+                  <a:pt x="-291395" y="2560320"/>
+                  <a:pt x="527907" y="3277210"/>
+                  <a:pt x="118256" y="3891687"/>
+                </a:cubicBezTo>
+              </a:path>
+            </a:pathLst>
+          </a:custGeom>
+          <a:noFill/>
+          <a:ln w="127938" cap="flat">
+            <a:solidFill>
+              <a:srgbClr val="00294B"/>
+            </a:solidFill>
+            <a:custDash>
+              <a:ds d="375000" sp="300000"/>
+            </a:custDash>
+            <a:miter/>
+          </a:ln>
+        </p:spPr>
+        <p:txBody>
+          <a:bodyPr rtlCol="0" anchor="ctr"/>
+          <a:lstStyle/>
+          <a:p>
+            <a:endParaRPr lang="fr-FR"/>
+          </a:p>
+        </p:txBody>
+      </p:sp>
+      <p:sp>
+        <p:nvSpPr>
+          <p:cNvPr id="9" name="Forme libre : forme 8">
+            <a:extLst>
+              <a:ext uri="{FF2B5EF4-FFF2-40B4-BE49-F238E27FC236}">
+                <a16:creationId xmlns:a16="http://schemas.microsoft.com/office/drawing/2014/main" id="{771034E5-B9B1-B89F-BEEA-0B5C8A3093C3}"/>
+              </a:ext>
+            </a:extLst>
+          </p:cNvPr>
+          <p:cNvSpPr/>
+          <p:nvPr/>
+        </p:nvSpPr>
+        <p:spPr>
+          <a:xfrm>
+            <a:off x="5327751" y="1997049"/>
+            <a:ext cx="2048256" cy="3891686"/>
+          </a:xfrm>
+          <a:custGeom>
+            <a:avLst/>
+            <a:gdLst>
+              <a:gd name="connsiteX0" fmla="*/ 0 w 2048256"/>
+              <a:gd name="connsiteY0" fmla="*/ 0 h 3891686"/>
+              <a:gd name="connsiteX1" fmla="*/ 2048256 w 2048256"/>
+              <a:gd name="connsiteY1" fmla="*/ 0 h 3891686"/>
+              <a:gd name="connsiteX2" fmla="*/ 2048256 w 2048256"/>
+              <a:gd name="connsiteY2" fmla="*/ 3891687 h 3891686"/>
+              <a:gd name="connsiteX3" fmla="*/ 0 w 2048256"/>
+              <a:gd name="connsiteY3" fmla="*/ 3891687 h 3891686"/>
+            </a:gdLst>
+            <a:ahLst/>
+            <a:cxnLst>
+              <a:cxn ang="0">
+                <a:pos x="connsiteX0" y="connsiteY0"/>
+              </a:cxn>
+              <a:cxn ang="0">
+                <a:pos x="connsiteX1" y="connsiteY1"/>
+              </a:cxn>
+              <a:cxn ang="0">
+                <a:pos x="connsiteX2" y="connsiteY2"/>
+              </a:cxn>
+              <a:cxn ang="0">
+                <a:pos x="connsiteX3" y="connsiteY3"/>
+              </a:cxn>
+            </a:cxnLst>
+            <a:rect l="l" t="t" r="r" b="b"/>
+            <a:pathLst>
+              <a:path w="2048256" h="3891686">
+                <a:moveTo>
+                  <a:pt x="0" y="0"/>
+                </a:moveTo>
+                <a:lnTo>
+                  <a:pt x="2048256" y="0"/>
+                </a:lnTo>
+                <a:lnTo>
+                  <a:pt x="2048256" y="3891687"/>
+                </a:lnTo>
+                <a:lnTo>
+                  <a:pt x="0" y="3891687"/>
+                </a:lnTo>
+                <a:close/>
+              </a:path>
+            </a:pathLst>
+          </a:custGeom>
+          <a:noFill/>
+          <a:ln w="179113" cap="flat">
+            <a:solidFill>
+              <a:srgbClr val="00294B"/>
+            </a:solidFill>
+            <a:prstDash val="solid"/>
+            <a:round/>
+          </a:ln>
+        </p:spPr>
+        <p:txBody>
+          <a:bodyPr rtlCol="0" anchor="ctr"/>
+          <a:lstStyle/>
+          <a:p>
+            <a:endParaRPr lang="fr-FR"/>
+          </a:p>
+        </p:txBody>
+      </p:sp>
+      <p:sp>
+        <p:nvSpPr>
+          <p:cNvPr id="10" name="Forme libre : forme 9">
+            <a:extLst>
+              <a:ext uri="{FF2B5EF4-FFF2-40B4-BE49-F238E27FC236}">
+                <a16:creationId xmlns:a16="http://schemas.microsoft.com/office/drawing/2014/main" id="{8DE02BEA-38F8-97A6-7EC6-D4F30860EF81}"/>
+              </a:ext>
+            </a:extLst>
+          </p:cNvPr>
+          <p:cNvSpPr/>
+          <p:nvPr/>
+        </p:nvSpPr>
+        <p:spPr>
+          <a:xfrm>
+            <a:off x="3893971" y="3021177"/>
+            <a:ext cx="1126540" cy="1843430"/>
+          </a:xfrm>
+          <a:custGeom>
+            <a:avLst/>
+            <a:gdLst>
+              <a:gd name="connsiteX0" fmla="*/ 0 w 1126540"/>
+              <a:gd name="connsiteY0" fmla="*/ 0 h 1843430"/>
+              <a:gd name="connsiteX1" fmla="*/ 1126541 w 1126540"/>
+              <a:gd name="connsiteY1" fmla="*/ 0 h 1843430"/>
+              <a:gd name="connsiteX2" fmla="*/ 0 w 1126540"/>
+              <a:gd name="connsiteY2" fmla="*/ 921715 h 1843430"/>
+              <a:gd name="connsiteX3" fmla="*/ 1126541 w 1126540"/>
+              <a:gd name="connsiteY3" fmla="*/ 921715 h 1843430"/>
+              <a:gd name="connsiteX4" fmla="*/ 0 w 1126540"/>
+              <a:gd name="connsiteY4" fmla="*/ 1843430 h 1843430"/>
+              <a:gd name="connsiteX5" fmla="*/ 1126541 w 1126540"/>
+              <a:gd name="connsiteY5" fmla="*/ 1843430 h 1843430"/>
+            </a:gdLst>
+            <a:ahLst/>
+            <a:cxnLst>
+              <a:cxn ang="0">
+                <a:pos x="connsiteX0" y="connsiteY0"/>
+              </a:cxn>
+              <a:cxn ang="0">
+                <a:pos x="connsiteX1" y="connsiteY1"/>
+              </a:cxn>
+              <a:cxn ang="0">
+                <a:pos x="connsiteX2" y="connsiteY2"/>
+              </a:cxn>
+              <a:cxn ang="0">
+                <a:pos x="connsiteX3" y="connsiteY3"/>
+              </a:cxn>
+              <a:cxn ang="0">
+                <a:pos x="connsiteX4" y="connsiteY4"/>
+              </a:cxn>
+              <a:cxn ang="0">
+                <a:pos x="connsiteX5" y="connsiteY5"/>
+              </a:cxn>
+            </a:cxnLst>
+            <a:rect l="l" t="t" r="r" b="b"/>
+            <a:pathLst>
+              <a:path w="1126540" h="1843430">
+                <a:moveTo>
+                  <a:pt x="0" y="0"/>
+                </a:moveTo>
+                <a:lnTo>
+                  <a:pt x="1126541" y="0"/>
+                </a:lnTo>
+                <a:moveTo>
+                  <a:pt x="0" y="921715"/>
+                </a:moveTo>
+                <a:lnTo>
+                  <a:pt x="1126541" y="921715"/>
+                </a:lnTo>
+                <a:moveTo>
+                  <a:pt x="0" y="1843430"/>
+                </a:moveTo>
+                <a:lnTo>
+                  <a:pt x="1126541" y="1843430"/>
+                </a:lnTo>
+              </a:path>
+            </a:pathLst>
+          </a:custGeom>
+          <a:solidFill>
+            <a:srgbClr val="000000"/>
+          </a:solidFill>
+          <a:ln w="179113" cap="rnd">
+            <a:solidFill>
+              <a:srgbClr val="C0392B"/>
+            </a:solidFill>
+            <a:prstDash val="solid"/>
+            <a:miter/>
+          </a:ln>
+        </p:spPr>
+        <p:txBody>
+          <a:bodyPr rtlCol="0" anchor="ctr"/>
+          <a:lstStyle/>
+          <a:p>
+            <a:endParaRPr lang="fr-FR"/>
+          </a:p>
+        </p:txBody>
+      </p:sp>
+      <p:sp>
+        <p:nvSpPr>
+          <p:cNvPr id="11" name="Forme libre : forme 10">
+            <a:extLst>
+              <a:ext uri="{FF2B5EF4-FFF2-40B4-BE49-F238E27FC236}">
+                <a16:creationId xmlns:a16="http://schemas.microsoft.com/office/drawing/2014/main" id="{7FE67CFC-CC90-0FA8-0335-0D3E9CA45B98}"/>
+              </a:ext>
+            </a:extLst>
+          </p:cNvPr>
+          <p:cNvSpPr/>
+          <p:nvPr/>
+        </p:nvSpPr>
+        <p:spPr>
+          <a:xfrm>
+            <a:off x="4713274" y="2713939"/>
+            <a:ext cx="307238" cy="2457907"/>
+          </a:xfrm>
+          <a:custGeom>
+            <a:avLst/>
+            <a:gdLst>
+              <a:gd name="connsiteX0" fmla="*/ 0 w 307238"/>
+              <a:gd name="connsiteY0" fmla="*/ 0 h 2457907"/>
+              <a:gd name="connsiteX1" fmla="*/ 307238 w 307238"/>
+              <a:gd name="connsiteY1" fmla="*/ 307238 h 2457907"/>
+              <a:gd name="connsiteX2" fmla="*/ 0 w 307238"/>
+              <a:gd name="connsiteY2" fmla="*/ 614477 h 2457907"/>
+              <a:gd name="connsiteX3" fmla="*/ 0 w 307238"/>
+              <a:gd name="connsiteY3" fmla="*/ 921715 h 2457907"/>
+              <a:gd name="connsiteX4" fmla="*/ 307238 w 307238"/>
+              <a:gd name="connsiteY4" fmla="*/ 1228954 h 2457907"/>
+              <a:gd name="connsiteX5" fmla="*/ 0 w 307238"/>
+              <a:gd name="connsiteY5" fmla="*/ 1536192 h 2457907"/>
+              <a:gd name="connsiteX6" fmla="*/ 0 w 307238"/>
+              <a:gd name="connsiteY6" fmla="*/ 1843430 h 2457907"/>
+              <a:gd name="connsiteX7" fmla="*/ 307238 w 307238"/>
+              <a:gd name="connsiteY7" fmla="*/ 2150669 h 2457907"/>
+              <a:gd name="connsiteX8" fmla="*/ 0 w 307238"/>
+              <a:gd name="connsiteY8" fmla="*/ 2457907 h 2457907"/>
+            </a:gdLst>
+            <a:ahLst/>
+            <a:cxnLst>
+              <a:cxn ang="0">
+                <a:pos x="connsiteX0" y="connsiteY0"/>
+              </a:cxn>
+              <a:cxn ang="0">
+                <a:pos x="connsiteX1" y="connsiteY1"/>
+              </a:cxn>
+              <a:cxn ang="0">
+                <a:pos x="connsiteX2" y="connsiteY2"/>
+              </a:cxn>
+              <a:cxn ang="0">
+                <a:pos x="connsiteX3" y="connsiteY3"/>
+              </a:cxn>
+              <a:cxn ang="0">
+                <a:pos x="connsiteX4" y="connsiteY4"/>
+              </a:cxn>
+              <a:cxn ang="0">
+                <a:pos x="connsiteX5" y="connsiteY5"/>
+              </a:cxn>
+              <a:cxn ang="0">
+                <a:pos x="connsiteX6" y="connsiteY6"/>
+              </a:cxn>
+              <a:cxn ang="0">
+                <a:pos x="connsiteX7" y="connsiteY7"/>
+              </a:cxn>
+              <a:cxn ang="0">
+                <a:pos x="connsiteX8" y="connsiteY8"/>
+              </a:cxn>
+            </a:cxnLst>
+            <a:rect l="l" t="t" r="r" b="b"/>
+            <a:pathLst>
+              <a:path w="307238" h="2457907">
+                <a:moveTo>
+                  <a:pt x="0" y="0"/>
+                </a:moveTo>
+                <a:lnTo>
+                  <a:pt x="307238" y="307238"/>
+                </a:lnTo>
+                <a:lnTo>
+                  <a:pt x="0" y="614477"/>
+                </a:lnTo>
+                <a:moveTo>
+                  <a:pt x="0" y="921715"/>
+                </a:moveTo>
+                <a:lnTo>
+                  <a:pt x="307238" y="1228954"/>
+                </a:lnTo>
+                <a:lnTo>
+                  <a:pt x="0" y="1536192"/>
+                </a:lnTo>
+                <a:moveTo>
+                  <a:pt x="0" y="1843430"/>
+                </a:moveTo>
+                <a:lnTo>
+                  <a:pt x="307238" y="2150669"/>
+                </a:lnTo>
+                <a:lnTo>
+                  <a:pt x="0" y="2457907"/>
+                </a:lnTo>
+              </a:path>
+            </a:pathLst>
+          </a:custGeom>
+          <a:noFill/>
+          <a:ln w="179113" cap="rnd">
+            <a:solidFill>
+              <a:srgbClr val="C0392B"/>
+            </a:solidFill>
+            <a:prstDash val="solid"/>
+            <a:round/>
+          </a:ln>
+        </p:spPr>
+        <p:txBody>
+          <a:bodyPr rtlCol="0" anchor="ctr"/>
+          <a:lstStyle/>
+          <a:p>
+            <a:endParaRPr lang="fr-FR"/>
+          </a:p>
+        </p:txBody>
+      </p:sp>
+      <p:sp>
+        <p:nvSpPr>
+          <p:cNvPr id="12" name="Forme libre : forme 11">
+            <a:extLst>
+              <a:ext uri="{FF2B5EF4-FFF2-40B4-BE49-F238E27FC236}">
+                <a16:creationId xmlns:a16="http://schemas.microsoft.com/office/drawing/2014/main" id="{070C56F2-5D15-8D78-35F6-1C698D3794BF}"/>
+              </a:ext>
+            </a:extLst>
+          </p:cNvPr>
+          <p:cNvSpPr/>
+          <p:nvPr/>
+        </p:nvSpPr>
+        <p:spPr>
+          <a:xfrm>
+            <a:off x="7683244" y="2816352"/>
+            <a:ext cx="460857" cy="2253081"/>
+          </a:xfrm>
+          <a:custGeom>
+            <a:avLst/>
+            <a:gdLst>
+              <a:gd name="connsiteX0" fmla="*/ 230429 w 460857"/>
+              <a:gd name="connsiteY0" fmla="*/ 0 h 2253081"/>
+              <a:gd name="connsiteX1" fmla="*/ 230429 w 460857"/>
+              <a:gd name="connsiteY1" fmla="*/ 1126541 h 2253081"/>
+              <a:gd name="connsiteX2" fmla="*/ 230429 w 460857"/>
+              <a:gd name="connsiteY2" fmla="*/ 2253082 h 2253081"/>
+            </a:gdLst>
+            <a:ahLst/>
+            <a:cxnLst>
+              <a:cxn ang="0">
+                <a:pos x="connsiteX0" y="connsiteY0"/>
+              </a:cxn>
+              <a:cxn ang="0">
+                <a:pos x="connsiteX1" y="connsiteY1"/>
+              </a:cxn>
+              <a:cxn ang="0">
+                <a:pos x="connsiteX2" y="connsiteY2"/>
+              </a:cxn>
+            </a:cxnLst>
+            <a:rect l="l" t="t" r="r" b="b"/>
+            <a:pathLst>
+              <a:path w="460857" h="2253081">
+                <a:moveTo>
+                  <a:pt x="230429" y="0"/>
+                </a:moveTo>
+                <a:cubicBezTo>
+                  <a:pt x="537667" y="307238"/>
+                  <a:pt x="537667" y="716890"/>
+                  <a:pt x="230429" y="1126541"/>
+                </a:cubicBezTo>
+                <a:cubicBezTo>
+                  <a:pt x="-76810" y="1536192"/>
+                  <a:pt x="-76810" y="1945843"/>
+                  <a:pt x="230429" y="2253082"/>
+                </a:cubicBezTo>
+              </a:path>
+            </a:pathLst>
+          </a:custGeom>
+          <a:noFill/>
+          <a:ln w="153526" cap="rnd">
+            <a:solidFill>
+              <a:srgbClr val="4D0DAB"/>
+            </a:solidFill>
+            <a:prstDash val="solid"/>
+            <a:miter/>
+          </a:ln>
+        </p:spPr>
+        <p:txBody>
+          <a:bodyPr rtlCol="0" anchor="ctr"/>
+          <a:lstStyle/>
+          <a:p>
+            <a:endParaRPr lang="fr-FR"/>
+          </a:p>
+        </p:txBody>
+      </p:sp>
     </p:spTree>
   </p:cSld>
   <p:clrMapOvr>
@@ -3360,8 +4080,8 @@
 </p:sld>
 </file>
 
-<file path=ppt/slides/slide2.xml><?xml version="1.0" encoding="utf-8"?>
-<p:sld xmlns:a="http://schemas.openxmlformats.org/drawingml/2006/main" xmlns:p="http://schemas.openxmlformats.org/presentationml/2006/main" xmlns:r="http://schemas.openxmlformats.org/officeDocument/2006/relationships">
+<file path=ppt/slides/slide12.xml><?xml version="1.0" encoding="utf-8"?>
+<p:sld xmlns:a="http://schemas.openxmlformats.org/drawingml/2006/main" xmlns:r="http://schemas.openxmlformats.org/officeDocument/2006/relationships" xmlns:p="http://schemas.openxmlformats.org/presentationml/2006/main">
   <p:cSld>
     <p:spTree>
       <p:nvGrpSpPr>
@@ -3369,66 +4089,466 @@
         <p:cNvGrpSpPr/>
         <p:nvPr/>
       </p:nvGrpSpPr>
-      <p:grpSpPr/>
-      <p:sp>
-        <p:nvSpPr>
-          <p:cNvPr id="2" name="TextBox 1"/>
-          <p:cNvSpPr txBox="1"/>
-          <p:nvPr/>
-        </p:nvSpPr>
-        <p:spPr>
-          <a:xfrm>
-            <a:off x="457200" y="274320"/>
-            <a:ext cx="10972800" cy="731520"/>
-          </a:xfrm>
-          <a:prstGeom prst="rect">
-            <a:avLst/>
-          </a:prstGeom>
-          <a:noFill/>
-        </p:spPr>
-        <p:txBody>
-          <a:bodyPr wrap="square">
-            <a:spAutoFit/>
-          </a:bodyPr>
-          <a:lstStyle/>
-          <a:p>
-            <a:r>
-              <a:rPr sz="2400" b="1"/>
-              <a:t>assets/icons/sota-building.svg</a:t>
-            </a:r>
-          </a:p>
-        </p:txBody>
-      </p:sp>
+      <p:grpSpPr>
+        <a:xfrm>
+          <a:off x="0" y="0"/>
+          <a:ext cx="0" cy="0"/>
+          <a:chOff x="0" y="0"/>
+          <a:chExt cx="0" cy="0"/>
+        </a:xfrm>
+      </p:grpSpPr>
       <p:pic>
         <p:nvPicPr>
-          <p:cNvPr id="3" name="Picture 2" descr="sota-building.png"/>
+          <p:cNvPr id="3" name="Image 2">
+            <a:extLst>
+              <a:ext uri="{FF2B5EF4-FFF2-40B4-BE49-F238E27FC236}">
+                <a16:creationId xmlns:a16="http://schemas.microsoft.com/office/drawing/2014/main" id="{57D4C053-23DB-B4BA-F5FD-34BC75874D91}"/>
+              </a:ext>
+            </a:extLst>
+          </p:cNvPr>
           <p:cNvPicPr>
             <a:picLocks noChangeAspect="1"/>
           </p:cNvPicPr>
           <p:nvPr/>
         </p:nvPicPr>
         <p:blipFill>
-          <a:blip r:embed="rId2">
-            <a:extLst>
-              <a:ext uri="{96DAC541-7B7A-43D3-8B79-37D633B846F1}">
-                <asvg:svgBlip xmlns:asvg="http://schemas.microsoft.com/office/drawing/2016/SVG/main" r:embed="rId3"/>
-              </a:ext>
-            </a:extLst>
-          </a:blip>
-          <a:stretch>
-            <a:fillRect/>
-          </a:stretch>
+          <a:blip r:embed="rId2"/>
+          <a:srcRect l="54959" r="4585"/>
+          <a:stretch/>
         </p:blipFill>
         <p:spPr>
           <a:xfrm>
-            <a:off x="3125876" y="1280160"/>
-            <a:ext cx="5939942" cy="5120640"/>
+            <a:off x="1808142" y="855015"/>
+            <a:ext cx="3008376" cy="4572235"/>
           </a:xfrm>
           <a:prstGeom prst="rect">
             <a:avLst/>
           </a:prstGeom>
         </p:spPr>
       </p:pic>
+      <p:pic>
+        <p:nvPicPr>
+          <p:cNvPr id="4" name="Image 3">
+            <a:extLst>
+              <a:ext uri="{FF2B5EF4-FFF2-40B4-BE49-F238E27FC236}">
+                <a16:creationId xmlns:a16="http://schemas.microsoft.com/office/drawing/2014/main" id="{26E29662-9C82-AC31-40A2-C6DBFBDC8CDA}"/>
+              </a:ext>
+            </a:extLst>
+          </p:cNvPr>
+          <p:cNvPicPr>
+            <a:picLocks noChangeAspect="1"/>
+          </p:cNvPicPr>
+          <p:nvPr/>
+        </p:nvPicPr>
+        <p:blipFill>
+          <a:blip r:embed="rId2"/>
+          <a:srcRect l="1510" r="52049"/>
+          <a:stretch/>
+        </p:blipFill>
+        <p:spPr>
+          <a:xfrm>
+            <a:off x="4816518" y="1282700"/>
+            <a:ext cx="2765850" cy="3661949"/>
+          </a:xfrm>
+          <a:prstGeom prst="rect">
+            <a:avLst/>
+          </a:prstGeom>
+        </p:spPr>
+      </p:pic>
+    </p:spTree>
+    <p:extLst>
+      <p:ext uri="{BB962C8B-B14F-4D97-AF65-F5344CB8AC3E}">
+        <p14:creationId xmlns:p14="http://schemas.microsoft.com/office/powerpoint/2010/main" val="2942038449"/>
+      </p:ext>
+    </p:extLst>
+  </p:cSld>
+  <p:clrMapOvr>
+    <a:masterClrMapping/>
+  </p:clrMapOvr>
+</p:sld>
+</file>
+
+<file path=ppt/slides/slide2.xml><?xml version="1.0" encoding="utf-8"?>
+<p:sld xmlns:a="http://schemas.openxmlformats.org/drawingml/2006/main" xmlns:r="http://schemas.openxmlformats.org/officeDocument/2006/relationships" xmlns:p="http://schemas.openxmlformats.org/presentationml/2006/main">
+  <p:cSld>
+    <p:spTree>
+      <p:nvGrpSpPr>
+        <p:cNvPr id="1" name=""/>
+        <p:cNvGrpSpPr/>
+        <p:nvPr/>
+      </p:nvGrpSpPr>
+      <p:grpSpPr>
+        <a:xfrm>
+          <a:off x="0" y="0"/>
+          <a:ext cx="0" cy="0"/>
+          <a:chOff x="0" y="0"/>
+          <a:chExt cx="0" cy="0"/>
+        </a:xfrm>
+      </p:grpSpPr>
+      <p:sp>
+        <p:nvSpPr>
+          <p:cNvPr id="2" name="TextBox 1"/>
+          <p:cNvSpPr txBox="1"/>
+          <p:nvPr/>
+        </p:nvSpPr>
+        <p:spPr>
+          <a:xfrm>
+            <a:off x="457200" y="274320"/>
+            <a:ext cx="10972800" cy="731520"/>
+          </a:xfrm>
+          <a:prstGeom prst="rect">
+            <a:avLst/>
+          </a:prstGeom>
+          <a:noFill/>
+        </p:spPr>
+        <p:txBody>
+          <a:bodyPr wrap="square">
+            <a:spAutoFit/>
+          </a:bodyPr>
+          <a:lstStyle/>
+          <a:p>
+            <a:r>
+              <a:rPr sz="2400" b="1"/>
+              <a:t>assets/icons/sota-building.svg</a:t>
+            </a:r>
+          </a:p>
+        </p:txBody>
+      </p:sp>
+      <p:sp>
+        <p:nvSpPr>
+          <p:cNvPr id="5" name="Forme libre : forme 4">
+            <a:extLst>
+              <a:ext uri="{FF2B5EF4-FFF2-40B4-BE49-F238E27FC236}">
+                <a16:creationId xmlns:a16="http://schemas.microsoft.com/office/drawing/2014/main" id="{5A3E5E7D-B411-177B-6DA2-CF0EBC785952}"/>
+              </a:ext>
+            </a:extLst>
+          </p:cNvPr>
+          <p:cNvSpPr/>
+          <p:nvPr/>
+        </p:nvSpPr>
+        <p:spPr>
+          <a:xfrm>
+            <a:off x="3740352" y="2304288"/>
+            <a:ext cx="3277209" cy="3686860"/>
+          </a:xfrm>
+          <a:custGeom>
+            <a:avLst/>
+            <a:gdLst>
+              <a:gd name="connsiteX0" fmla="*/ 0 w 3277209"/>
+              <a:gd name="connsiteY0" fmla="*/ 3686861 h 3686860"/>
+              <a:gd name="connsiteX1" fmla="*/ 0 w 3277209"/>
+              <a:gd name="connsiteY1" fmla="*/ 1228954 h 3686860"/>
+              <a:gd name="connsiteX2" fmla="*/ 1638605 w 3277209"/>
+              <a:gd name="connsiteY2" fmla="*/ 0 h 3686860"/>
+              <a:gd name="connsiteX3" fmla="*/ 3277210 w 3277209"/>
+              <a:gd name="connsiteY3" fmla="*/ 1228954 h 3686860"/>
+              <a:gd name="connsiteX4" fmla="*/ 3277210 w 3277209"/>
+              <a:gd name="connsiteY4" fmla="*/ 3686861 h 3686860"/>
+            </a:gdLst>
+            <a:ahLst/>
+            <a:cxnLst>
+              <a:cxn ang="0">
+                <a:pos x="connsiteX0" y="connsiteY0"/>
+              </a:cxn>
+              <a:cxn ang="0">
+                <a:pos x="connsiteX1" y="connsiteY1"/>
+              </a:cxn>
+              <a:cxn ang="0">
+                <a:pos x="connsiteX2" y="connsiteY2"/>
+              </a:cxn>
+              <a:cxn ang="0">
+                <a:pos x="connsiteX3" y="connsiteY3"/>
+              </a:cxn>
+              <a:cxn ang="0">
+                <a:pos x="connsiteX4" y="connsiteY4"/>
+              </a:cxn>
+            </a:cxnLst>
+            <a:rect l="l" t="t" r="r" b="b"/>
+            <a:pathLst>
+              <a:path w="3277209" h="3686860">
+                <a:moveTo>
+                  <a:pt x="0" y="3686861"/>
+                </a:moveTo>
+                <a:lnTo>
+                  <a:pt x="0" y="1228954"/>
+                </a:lnTo>
+                <a:lnTo>
+                  <a:pt x="1638605" y="0"/>
+                </a:lnTo>
+                <a:lnTo>
+                  <a:pt x="3277210" y="1228954"/>
+                </a:lnTo>
+                <a:lnTo>
+                  <a:pt x="3277210" y="3686861"/>
+                </a:lnTo>
+                <a:close/>
+              </a:path>
+            </a:pathLst>
+          </a:custGeom>
+          <a:solidFill>
+            <a:srgbClr val="DFE7EF"/>
+          </a:solidFill>
+          <a:ln w="204623" cap="flat">
+            <a:solidFill>
+              <a:srgbClr val="00294B"/>
+            </a:solidFill>
+            <a:prstDash val="solid"/>
+            <a:miter/>
+          </a:ln>
+        </p:spPr>
+        <p:txBody>
+          <a:bodyPr rtlCol="0" anchor="ctr"/>
+          <a:lstStyle/>
+          <a:p>
+            <a:endParaRPr lang="fr-FR"/>
+          </a:p>
+        </p:txBody>
+      </p:sp>
+      <p:sp>
+        <p:nvSpPr>
+          <p:cNvPr id="6" name="Forme libre : forme 5">
+            <a:extLst>
+              <a:ext uri="{FF2B5EF4-FFF2-40B4-BE49-F238E27FC236}">
+                <a16:creationId xmlns:a16="http://schemas.microsoft.com/office/drawing/2014/main" id="{CD452A6F-4A5D-C673-1413-50B653F7DE80}"/>
+              </a:ext>
+            </a:extLst>
+          </p:cNvPr>
+          <p:cNvSpPr/>
+          <p:nvPr/>
+        </p:nvSpPr>
+        <p:spPr>
+          <a:xfrm>
+            <a:off x="7222387" y="3123590"/>
+            <a:ext cx="1433779" cy="2867558"/>
+          </a:xfrm>
+          <a:custGeom>
+            <a:avLst/>
+            <a:gdLst>
+              <a:gd name="connsiteX0" fmla="*/ 0 w 1433779"/>
+              <a:gd name="connsiteY0" fmla="*/ 0 h 2867558"/>
+              <a:gd name="connsiteX1" fmla="*/ 1433779 w 1433779"/>
+              <a:gd name="connsiteY1" fmla="*/ 0 h 2867558"/>
+              <a:gd name="connsiteX2" fmla="*/ 1433779 w 1433779"/>
+              <a:gd name="connsiteY2" fmla="*/ 2867559 h 2867558"/>
+              <a:gd name="connsiteX3" fmla="*/ 0 w 1433779"/>
+              <a:gd name="connsiteY3" fmla="*/ 2867559 h 2867558"/>
+            </a:gdLst>
+            <a:ahLst/>
+            <a:cxnLst>
+              <a:cxn ang="0">
+                <a:pos x="connsiteX0" y="connsiteY0"/>
+              </a:cxn>
+              <a:cxn ang="0">
+                <a:pos x="connsiteX1" y="connsiteY1"/>
+              </a:cxn>
+              <a:cxn ang="0">
+                <a:pos x="connsiteX2" y="connsiteY2"/>
+              </a:cxn>
+              <a:cxn ang="0">
+                <a:pos x="connsiteX3" y="connsiteY3"/>
+              </a:cxn>
+            </a:cxnLst>
+            <a:rect l="l" t="t" r="r" b="b"/>
+            <a:pathLst>
+              <a:path w="1433779" h="2867558">
+                <a:moveTo>
+                  <a:pt x="0" y="0"/>
+                </a:moveTo>
+                <a:lnTo>
+                  <a:pt x="1433779" y="0"/>
+                </a:lnTo>
+                <a:lnTo>
+                  <a:pt x="1433779" y="2867559"/>
+                </a:lnTo>
+                <a:lnTo>
+                  <a:pt x="0" y="2867559"/>
+                </a:lnTo>
+                <a:close/>
+              </a:path>
+            </a:pathLst>
+          </a:custGeom>
+          <a:solidFill>
+            <a:srgbClr val="DFE7EF"/>
+          </a:solidFill>
+          <a:ln w="204623" cap="flat">
+            <a:solidFill>
+              <a:srgbClr val="00294B"/>
+            </a:solidFill>
+            <a:prstDash val="solid"/>
+            <a:miter/>
+          </a:ln>
+        </p:spPr>
+        <p:txBody>
+          <a:bodyPr rtlCol="0" anchor="ctr"/>
+          <a:lstStyle/>
+          <a:p>
+            <a:endParaRPr lang="fr-FR"/>
+          </a:p>
+        </p:txBody>
+      </p:sp>
+      <p:sp>
+        <p:nvSpPr>
+          <p:cNvPr id="7" name="Forme libre : forme 6">
+            <a:extLst>
+              <a:ext uri="{FF2B5EF4-FFF2-40B4-BE49-F238E27FC236}">
+                <a16:creationId xmlns:a16="http://schemas.microsoft.com/office/drawing/2014/main" id="{1E8519F3-F9E4-EB39-F9BD-7F1837A31CA3}"/>
+              </a:ext>
+            </a:extLst>
+          </p:cNvPr>
+          <p:cNvSpPr/>
+          <p:nvPr/>
+        </p:nvSpPr>
+        <p:spPr>
+          <a:xfrm>
+            <a:off x="7529626" y="1587398"/>
+            <a:ext cx="1024127" cy="1024128"/>
+          </a:xfrm>
+          <a:custGeom>
+            <a:avLst/>
+            <a:gdLst>
+              <a:gd name="connsiteX0" fmla="*/ 1024128 w 1024127"/>
+              <a:gd name="connsiteY0" fmla="*/ 512064 h 1024128"/>
+              <a:gd name="connsiteX1" fmla="*/ 512064 w 1024127"/>
+              <a:gd name="connsiteY1" fmla="*/ 1024128 h 1024128"/>
+              <a:gd name="connsiteX2" fmla="*/ 0 w 1024127"/>
+              <a:gd name="connsiteY2" fmla="*/ 512064 h 1024128"/>
+              <a:gd name="connsiteX3" fmla="*/ 512064 w 1024127"/>
+              <a:gd name="connsiteY3" fmla="*/ 0 h 1024128"/>
+              <a:gd name="connsiteX4" fmla="*/ 1024128 w 1024127"/>
+              <a:gd name="connsiteY4" fmla="*/ 512064 h 1024128"/>
+            </a:gdLst>
+            <a:ahLst/>
+            <a:cxnLst>
+              <a:cxn ang="0">
+                <a:pos x="connsiteX0" y="connsiteY0"/>
+              </a:cxn>
+              <a:cxn ang="0">
+                <a:pos x="connsiteX1" y="connsiteY1"/>
+              </a:cxn>
+              <a:cxn ang="0">
+                <a:pos x="connsiteX2" y="connsiteY2"/>
+              </a:cxn>
+              <a:cxn ang="0">
+                <a:pos x="connsiteX3" y="connsiteY3"/>
+              </a:cxn>
+              <a:cxn ang="0">
+                <a:pos x="connsiteX4" y="connsiteY4"/>
+              </a:cxn>
+            </a:cxnLst>
+            <a:rect l="l" t="t" r="r" b="b"/>
+            <a:pathLst>
+              <a:path w="1024127" h="1024128">
+                <a:moveTo>
+                  <a:pt x="1024128" y="512064"/>
+                </a:moveTo>
+                <a:cubicBezTo>
+                  <a:pt x="1024128" y="794869"/>
+                  <a:pt x="794869" y="1024128"/>
+                  <a:pt x="512064" y="1024128"/>
+                </a:cubicBezTo>
+                <a:cubicBezTo>
+                  <a:pt x="229259" y="1024128"/>
+                  <a:pt x="0" y="794869"/>
+                  <a:pt x="0" y="512064"/>
+                </a:cubicBezTo>
+                <a:cubicBezTo>
+                  <a:pt x="0" y="229259"/>
+                  <a:pt x="229259" y="0"/>
+                  <a:pt x="512064" y="0"/>
+                </a:cubicBezTo>
+                <a:cubicBezTo>
+                  <a:pt x="794869" y="0"/>
+                  <a:pt x="1024128" y="229259"/>
+                  <a:pt x="1024128" y="512064"/>
+                </a:cubicBezTo>
+                <a:close/>
+              </a:path>
+            </a:pathLst>
+          </a:custGeom>
+          <a:solidFill>
+            <a:srgbClr val="FEEA6D"/>
+          </a:solidFill>
+          <a:ln w="102312" cap="flat">
+            <a:solidFill>
+              <a:srgbClr val="C9A800"/>
+            </a:solidFill>
+            <a:prstDash val="solid"/>
+            <a:miter/>
+          </a:ln>
+        </p:spPr>
+        <p:txBody>
+          <a:bodyPr rtlCol="0" anchor="ctr"/>
+          <a:lstStyle/>
+          <a:p>
+            <a:endParaRPr lang="fr-FR"/>
+          </a:p>
+        </p:txBody>
+      </p:sp>
+      <p:sp>
+        <p:nvSpPr>
+          <p:cNvPr id="8" name="Forme libre : forme 7">
+            <a:extLst>
+              <a:ext uri="{FF2B5EF4-FFF2-40B4-BE49-F238E27FC236}">
+                <a16:creationId xmlns:a16="http://schemas.microsoft.com/office/drawing/2014/main" id="{A77FBC40-30AD-EC66-7A61-32C3B32E9471}"/>
+              </a:ext>
+            </a:extLst>
+          </p:cNvPr>
+          <p:cNvSpPr/>
+          <p:nvPr/>
+        </p:nvSpPr>
+        <p:spPr>
+          <a:xfrm>
+            <a:off x="3330701" y="5991148"/>
+            <a:ext cx="5530290" cy="102412"/>
+          </a:xfrm>
+          <a:custGeom>
+            <a:avLst/>
+            <a:gdLst>
+              <a:gd name="connsiteX0" fmla="*/ 0 w 5530290"/>
+              <a:gd name="connsiteY0" fmla="*/ 0 h 102412"/>
+              <a:gd name="connsiteX1" fmla="*/ 5530291 w 5530290"/>
+              <a:gd name="connsiteY1" fmla="*/ 0 h 102412"/>
+            </a:gdLst>
+            <a:ahLst/>
+            <a:cxnLst>
+              <a:cxn ang="0">
+                <a:pos x="connsiteX0" y="connsiteY0"/>
+              </a:cxn>
+              <a:cxn ang="0">
+                <a:pos x="connsiteX1" y="connsiteY1"/>
+              </a:cxn>
+            </a:cxnLst>
+            <a:rect l="l" t="t" r="r" b="b"/>
+            <a:pathLst>
+              <a:path w="5530290" h="102412">
+                <a:moveTo>
+                  <a:pt x="0" y="0"/>
+                </a:moveTo>
+                <a:lnTo>
+                  <a:pt x="5530291" y="0"/>
+                </a:lnTo>
+              </a:path>
+            </a:pathLst>
+          </a:custGeom>
+          <a:solidFill>
+            <a:srgbClr val="000000"/>
+          </a:solidFill>
+          <a:ln w="204623" cap="flat">
+            <a:solidFill>
+              <a:srgbClr val="00294B"/>
+            </a:solidFill>
+            <a:prstDash val="solid"/>
+            <a:miter/>
+          </a:ln>
+        </p:spPr>
+        <p:txBody>
+          <a:bodyPr rtlCol="0" anchor="ctr"/>
+          <a:lstStyle/>
+          <a:p>
+            <a:endParaRPr lang="fr-FR"/>
+          </a:p>
+        </p:txBody>
+      </p:sp>
     </p:spTree>
   </p:cSld>
   <p:clrMapOvr>
@@ -3438,7 +4558,7 @@
 </file>
 
 <file path=ppt/slides/slide3.xml><?xml version="1.0" encoding="utf-8"?>
-<p:sld xmlns:a="http://schemas.openxmlformats.org/drawingml/2006/main" xmlns:p="http://schemas.openxmlformats.org/presentationml/2006/main" xmlns:r="http://schemas.openxmlformats.org/officeDocument/2006/relationships">
+<p:sld xmlns:a="http://schemas.openxmlformats.org/drawingml/2006/main" xmlns:r="http://schemas.openxmlformats.org/officeDocument/2006/relationships" xmlns:p="http://schemas.openxmlformats.org/presentationml/2006/main">
   <p:cSld>
     <p:spTree>
       <p:nvGrpSpPr>
@@ -3446,7 +4566,14 @@
         <p:cNvGrpSpPr/>
         <p:nvPr/>
       </p:nvGrpSpPr>
-      <p:grpSpPr/>
+      <p:grpSpPr>
+        <a:xfrm>
+          <a:off x="0" y="0"/>
+          <a:ext cx="0" cy="0"/>
+          <a:chOff x="0" y="0"/>
+          <a:chExt cx="0" cy="0"/>
+        </a:xfrm>
+      </p:grpSpPr>
       <p:sp>
         <p:nvSpPr>
           <p:cNvPr id="2" name="TextBox 1"/>
@@ -3515,7 +4642,7 @@
 </file>
 
 <file path=ppt/slides/slide4.xml><?xml version="1.0" encoding="utf-8"?>
-<p:sld xmlns:a="http://schemas.openxmlformats.org/drawingml/2006/main" xmlns:p="http://schemas.openxmlformats.org/presentationml/2006/main" xmlns:r="http://schemas.openxmlformats.org/officeDocument/2006/relationships">
+<p:sld xmlns:a="http://schemas.openxmlformats.org/drawingml/2006/main" xmlns:r="http://schemas.openxmlformats.org/officeDocument/2006/relationships" xmlns:p="http://schemas.openxmlformats.org/presentationml/2006/main">
   <p:cSld>
     <p:spTree>
       <p:nvGrpSpPr>
@@ -3523,7 +4650,14 @@
         <p:cNvGrpSpPr/>
         <p:nvPr/>
       </p:nvGrpSpPr>
-      <p:grpSpPr/>
+      <p:grpSpPr>
+        <a:xfrm>
+          <a:off x="0" y="0"/>
+          <a:ext cx="0" cy="0"/>
+          <a:chOff x="0" y="0"/>
+          <a:chExt cx="0" cy="0"/>
+        </a:xfrm>
+      </p:grpSpPr>
       <p:sp>
         <p:nvSpPr>
           <p:cNvPr id="2" name="TextBox 1"/>
@@ -3592,7 +4726,7 @@
 </file>
 
 <file path=ppt/slides/slide5.xml><?xml version="1.0" encoding="utf-8"?>
-<p:sld xmlns:a="http://schemas.openxmlformats.org/drawingml/2006/main" xmlns:p="http://schemas.openxmlformats.org/presentationml/2006/main" xmlns:r="http://schemas.openxmlformats.org/officeDocument/2006/relationships">
+<p:sld xmlns:a="http://schemas.openxmlformats.org/drawingml/2006/main" xmlns:r="http://schemas.openxmlformats.org/officeDocument/2006/relationships" xmlns:p="http://schemas.openxmlformats.org/presentationml/2006/main">
   <p:cSld>
     <p:spTree>
       <p:nvGrpSpPr>
@@ -3600,7 +4734,14 @@
         <p:cNvGrpSpPr/>
         <p:nvPr/>
       </p:nvGrpSpPr>
-      <p:grpSpPr/>
+      <p:grpSpPr>
+        <a:xfrm>
+          <a:off x="0" y="0"/>
+          <a:ext cx="0" cy="0"/>
+          <a:chOff x="0" y="0"/>
+          <a:chExt cx="0" cy="0"/>
+        </a:xfrm>
+      </p:grpSpPr>
       <p:sp>
         <p:nvSpPr>
           <p:cNvPr id="2" name="TextBox 1"/>
@@ -3669,7 +4810,7 @@
 </file>
 
 <file path=ppt/slides/slide6.xml><?xml version="1.0" encoding="utf-8"?>
-<p:sld xmlns:a="http://schemas.openxmlformats.org/drawingml/2006/main" xmlns:p="http://schemas.openxmlformats.org/presentationml/2006/main" xmlns:r="http://schemas.openxmlformats.org/officeDocument/2006/relationships">
+<p:sld xmlns:a="http://schemas.openxmlformats.org/drawingml/2006/main" xmlns:r="http://schemas.openxmlformats.org/officeDocument/2006/relationships" xmlns:p="http://schemas.openxmlformats.org/presentationml/2006/main">
   <p:cSld>
     <p:spTree>
       <p:nvGrpSpPr>
@@ -3677,7 +4818,14 @@
         <p:cNvGrpSpPr/>
         <p:nvPr/>
       </p:nvGrpSpPr>
-      <p:grpSpPr/>
+      <p:grpSpPr>
+        <a:xfrm>
+          <a:off x="0" y="0"/>
+          <a:ext cx="0" cy="0"/>
+          <a:chOff x="0" y="0"/>
+          <a:chExt cx="0" cy="0"/>
+        </a:xfrm>
+      </p:grpSpPr>
       <p:sp>
         <p:nvSpPr>
           <p:cNvPr id="2" name="TextBox 1"/>
@@ -3746,7 +4894,7 @@
 </file>
 
 <file path=ppt/slides/slide7.xml><?xml version="1.0" encoding="utf-8"?>
-<p:sld xmlns:a="http://schemas.openxmlformats.org/drawingml/2006/main" xmlns:p="http://schemas.openxmlformats.org/presentationml/2006/main" xmlns:r="http://schemas.openxmlformats.org/officeDocument/2006/relationships">
+<p:sld xmlns:a="http://schemas.openxmlformats.org/drawingml/2006/main" xmlns:r="http://schemas.openxmlformats.org/officeDocument/2006/relationships" xmlns:p="http://schemas.openxmlformats.org/presentationml/2006/main">
   <p:cSld>
     <p:spTree>
       <p:nvGrpSpPr>
@@ -3754,7 +4902,14 @@
         <p:cNvGrpSpPr/>
         <p:nvPr/>
       </p:nvGrpSpPr>
-      <p:grpSpPr/>
+      <p:grpSpPr>
+        <a:xfrm>
+          <a:off x="0" y="0"/>
+          <a:ext cx="0" cy="0"/>
+          <a:chOff x="0" y="0"/>
+          <a:chExt cx="0" cy="0"/>
+        </a:xfrm>
+      </p:grpSpPr>
       <p:sp>
         <p:nvSpPr>
           <p:cNvPr id="2" name="TextBox 1"/>
@@ -3823,7 +4978,7 @@
 </file>
 
 <file path=ppt/slides/slide8.xml><?xml version="1.0" encoding="utf-8"?>
-<p:sld xmlns:a="http://schemas.openxmlformats.org/drawingml/2006/main" xmlns:p="http://schemas.openxmlformats.org/presentationml/2006/main" xmlns:r="http://schemas.openxmlformats.org/officeDocument/2006/relationships">
+<p:sld xmlns:a="http://schemas.openxmlformats.org/drawingml/2006/main" xmlns:r="http://schemas.openxmlformats.org/officeDocument/2006/relationships" xmlns:p="http://schemas.openxmlformats.org/presentationml/2006/main">
   <p:cSld>
     <p:spTree>
       <p:nvGrpSpPr>
@@ -3831,7 +4986,14 @@
         <p:cNvGrpSpPr/>
         <p:nvPr/>
       </p:nvGrpSpPr>
-      <p:grpSpPr/>
+      <p:grpSpPr>
+        <a:xfrm>
+          <a:off x="0" y="0"/>
+          <a:ext cx="0" cy="0"/>
+          <a:chOff x="0" y="0"/>
+          <a:chExt cx="0" cy="0"/>
+        </a:xfrm>
+      </p:grpSpPr>
       <p:sp>
         <p:nvSpPr>
           <p:cNvPr id="2" name="TextBox 1"/>
@@ -3900,7 +5062,7 @@
 </file>
 
 <file path=ppt/slides/slide9.xml><?xml version="1.0" encoding="utf-8"?>
-<p:sld xmlns:a="http://schemas.openxmlformats.org/drawingml/2006/main" xmlns:p="http://schemas.openxmlformats.org/presentationml/2006/main" xmlns:r="http://schemas.openxmlformats.org/officeDocument/2006/relationships">
+<p:sld xmlns:a="http://schemas.openxmlformats.org/drawingml/2006/main" xmlns:r="http://schemas.openxmlformats.org/officeDocument/2006/relationships" xmlns:p="http://schemas.openxmlformats.org/presentationml/2006/main">
   <p:cSld>
     <p:spTree>
       <p:nvGrpSpPr>
@@ -3908,7 +5070,14 @@
         <p:cNvGrpSpPr/>
         <p:nvPr/>
       </p:nvGrpSpPr>
-      <p:grpSpPr/>
+      <p:grpSpPr>
+        <a:xfrm>
+          <a:off x="0" y="0"/>
+          <a:ext cx="0" cy="0"/>
+          <a:chOff x="0" y="0"/>
+          <a:chExt cx="0" cy="0"/>
+        </a:xfrm>
+      </p:grpSpPr>
       <p:sp>
         <p:nvSpPr>
           <p:cNvPr id="2" name="TextBox 1"/>
@@ -3938,36 +5107,850 @@
           </a:p>
         </p:txBody>
       </p:sp>
-      <p:pic>
-        <p:nvPicPr>
-          <p:cNvPr id="3" name="Picture 2" descr="toc-cosimulation.png"/>
-          <p:cNvPicPr>
-            <a:picLocks noChangeAspect="1"/>
-          </p:cNvPicPr>
-          <p:nvPr/>
-        </p:nvPicPr>
-        <p:blipFill>
-          <a:blip r:embed="rId2">
+      <p:sp>
+        <p:nvSpPr>
+          <p:cNvPr id="5" name="Forme libre : forme 4">
             <a:extLst>
-              <a:ext uri="{96DAC541-7B7A-43D3-8B79-37D633B846F1}">
-                <asvg:svgBlip xmlns:asvg="http://schemas.microsoft.com/office/drawing/2016/SVG/main" r:embed="rId3"/>
+              <a:ext uri="{FF2B5EF4-FFF2-40B4-BE49-F238E27FC236}">
+                <a16:creationId xmlns:a16="http://schemas.microsoft.com/office/drawing/2014/main" id="{94C00043-2A2B-990C-E4A6-023E864C8CDC}"/>
               </a:ext>
             </a:extLst>
-          </a:blip>
-          <a:stretch>
-            <a:fillRect/>
-          </a:stretch>
-        </p:blipFill>
-        <p:spPr>
-          <a:xfrm>
-            <a:off x="3279495" y="1280160"/>
-            <a:ext cx="5632704" cy="5120640"/>
-          </a:xfrm>
-          <a:prstGeom prst="rect">
+          </p:cNvPr>
+          <p:cNvSpPr/>
+          <p:nvPr/>
+        </p:nvSpPr>
+        <p:spPr>
+          <a:xfrm>
+            <a:off x="3740352" y="1587398"/>
+            <a:ext cx="4710988" cy="4710988"/>
+          </a:xfrm>
+          <a:custGeom>
             <a:avLst/>
-          </a:prstGeom>
-        </p:spPr>
-      </p:pic>
+            <a:gdLst>
+              <a:gd name="connsiteX0" fmla="*/ 4710989 w 4710988"/>
+              <a:gd name="connsiteY0" fmla="*/ 2355495 h 4710988"/>
+              <a:gd name="connsiteX1" fmla="*/ 2355495 w 4710988"/>
+              <a:gd name="connsiteY1" fmla="*/ 4710989 h 4710988"/>
+              <a:gd name="connsiteX2" fmla="*/ 0 w 4710988"/>
+              <a:gd name="connsiteY2" fmla="*/ 2355495 h 4710988"/>
+              <a:gd name="connsiteX3" fmla="*/ 2355495 w 4710988"/>
+              <a:gd name="connsiteY3" fmla="*/ 0 h 4710988"/>
+              <a:gd name="connsiteX4" fmla="*/ 4710989 w 4710988"/>
+              <a:gd name="connsiteY4" fmla="*/ 2355495 h 4710988"/>
+            </a:gdLst>
+            <a:ahLst/>
+            <a:cxnLst>
+              <a:cxn ang="0">
+                <a:pos x="connsiteX0" y="connsiteY0"/>
+              </a:cxn>
+              <a:cxn ang="0">
+                <a:pos x="connsiteX1" y="connsiteY1"/>
+              </a:cxn>
+              <a:cxn ang="0">
+                <a:pos x="connsiteX2" y="connsiteY2"/>
+              </a:cxn>
+              <a:cxn ang="0">
+                <a:pos x="connsiteX3" y="connsiteY3"/>
+              </a:cxn>
+              <a:cxn ang="0">
+                <a:pos x="connsiteX4" y="connsiteY4"/>
+              </a:cxn>
+            </a:cxnLst>
+            <a:rect l="l" t="t" r="r" b="b"/>
+            <a:pathLst>
+              <a:path w="4710988" h="4710988">
+                <a:moveTo>
+                  <a:pt x="4710989" y="2355495"/>
+                </a:moveTo>
+                <a:cubicBezTo>
+                  <a:pt x="4710989" y="3656398"/>
+                  <a:pt x="3656398" y="4710989"/>
+                  <a:pt x="2355495" y="4710989"/>
+                </a:cubicBezTo>
+                <a:cubicBezTo>
+                  <a:pt x="1054591" y="4710989"/>
+                  <a:pt x="0" y="3656398"/>
+                  <a:pt x="0" y="2355495"/>
+                </a:cubicBezTo>
+                <a:cubicBezTo>
+                  <a:pt x="0" y="1054591"/>
+                  <a:pt x="1054591" y="0"/>
+                  <a:pt x="2355495" y="0"/>
+                </a:cubicBezTo>
+                <a:cubicBezTo>
+                  <a:pt x="3656398" y="0"/>
+                  <a:pt x="4710989" y="1054591"/>
+                  <a:pt x="4710989" y="2355495"/>
+                </a:cubicBezTo>
+                <a:close/>
+              </a:path>
+            </a:pathLst>
+          </a:custGeom>
+          <a:solidFill>
+            <a:srgbClr val="EFE8FB"/>
+          </a:solidFill>
+          <a:ln w="51175" cap="flat">
+            <a:noFill/>
+            <a:prstDash val="solid"/>
+            <a:miter/>
+          </a:ln>
+        </p:spPr>
+        <p:txBody>
+          <a:bodyPr rtlCol="0" anchor="ctr"/>
+          <a:lstStyle/>
+          <a:p>
+            <a:endParaRPr lang="fr-FR"/>
+          </a:p>
+        </p:txBody>
+      </p:sp>
+      <p:sp>
+        <p:nvSpPr>
+          <p:cNvPr id="6" name="Forme libre : forme 5">
+            <a:extLst>
+              <a:ext uri="{FF2B5EF4-FFF2-40B4-BE49-F238E27FC236}">
+                <a16:creationId xmlns:a16="http://schemas.microsoft.com/office/drawing/2014/main" id="{9FFDE7D2-EA93-FD69-B37F-2084303368AA}"/>
+              </a:ext>
+            </a:extLst>
+          </p:cNvPr>
+          <p:cNvSpPr/>
+          <p:nvPr/>
+        </p:nvSpPr>
+        <p:spPr>
+          <a:xfrm>
+            <a:off x="3305099" y="2710282"/>
+            <a:ext cx="1945843" cy="2560320"/>
+          </a:xfrm>
+          <a:custGeom>
+            <a:avLst/>
+            <a:gdLst>
+              <a:gd name="connsiteX0" fmla="*/ 0 w 1945843"/>
+              <a:gd name="connsiteY0" fmla="*/ 921715 h 2560320"/>
+              <a:gd name="connsiteX1" fmla="*/ 972922 w 1945843"/>
+              <a:gd name="connsiteY1" fmla="*/ 0 h 2560320"/>
+              <a:gd name="connsiteX2" fmla="*/ 1945843 w 1945843"/>
+              <a:gd name="connsiteY2" fmla="*/ 921715 h 2560320"/>
+              <a:gd name="connsiteX3" fmla="*/ 1945843 w 1945843"/>
+              <a:gd name="connsiteY3" fmla="*/ 2560320 h 2560320"/>
+              <a:gd name="connsiteX4" fmla="*/ 0 w 1945843"/>
+              <a:gd name="connsiteY4" fmla="*/ 2560320 h 2560320"/>
+            </a:gdLst>
+            <a:ahLst/>
+            <a:cxnLst>
+              <a:cxn ang="0">
+                <a:pos x="connsiteX0" y="connsiteY0"/>
+              </a:cxn>
+              <a:cxn ang="0">
+                <a:pos x="connsiteX1" y="connsiteY1"/>
+              </a:cxn>
+              <a:cxn ang="0">
+                <a:pos x="connsiteX2" y="connsiteY2"/>
+              </a:cxn>
+              <a:cxn ang="0">
+                <a:pos x="connsiteX3" y="connsiteY3"/>
+              </a:cxn>
+              <a:cxn ang="0">
+                <a:pos x="connsiteX4" y="connsiteY4"/>
+              </a:cxn>
+            </a:cxnLst>
+            <a:rect l="l" t="t" r="r" b="b"/>
+            <a:pathLst>
+              <a:path w="1945843" h="2560320">
+                <a:moveTo>
+                  <a:pt x="0" y="921715"/>
+                </a:moveTo>
+                <a:lnTo>
+                  <a:pt x="972922" y="0"/>
+                </a:lnTo>
+                <a:lnTo>
+                  <a:pt x="1945843" y="921715"/>
+                </a:lnTo>
+                <a:lnTo>
+                  <a:pt x="1945843" y="2560320"/>
+                </a:lnTo>
+                <a:lnTo>
+                  <a:pt x="0" y="2560320"/>
+                </a:lnTo>
+                <a:close/>
+              </a:path>
+            </a:pathLst>
+          </a:custGeom>
+          <a:solidFill>
+            <a:srgbClr val="FFFFFF"/>
+          </a:solidFill>
+          <a:ln w="179113" cap="flat">
+            <a:solidFill>
+              <a:srgbClr val="4D0DAB"/>
+            </a:solidFill>
+            <a:prstDash val="solid"/>
+            <a:round/>
+          </a:ln>
+        </p:spPr>
+        <p:txBody>
+          <a:bodyPr rtlCol="0" anchor="ctr"/>
+          <a:lstStyle/>
+          <a:p>
+            <a:endParaRPr lang="fr-FR"/>
+          </a:p>
+        </p:txBody>
+      </p:sp>
+      <p:sp>
+        <p:nvSpPr>
+          <p:cNvPr id="7" name="Forme libre : forme 6">
+            <a:extLst>
+              <a:ext uri="{FF2B5EF4-FFF2-40B4-BE49-F238E27FC236}">
+                <a16:creationId xmlns:a16="http://schemas.microsoft.com/office/drawing/2014/main" id="{793D84E1-B484-F427-6C86-90C5A5A2F665}"/>
+              </a:ext>
+            </a:extLst>
+          </p:cNvPr>
+          <p:cNvSpPr/>
+          <p:nvPr/>
+        </p:nvSpPr>
+        <p:spPr>
+          <a:xfrm>
+            <a:off x="3868369" y="4246474"/>
+            <a:ext cx="819302" cy="1024128"/>
+          </a:xfrm>
+          <a:custGeom>
+            <a:avLst/>
+            <a:gdLst>
+              <a:gd name="connsiteX0" fmla="*/ 0 w 819302"/>
+              <a:gd name="connsiteY0" fmla="*/ 1024128 h 1024128"/>
+              <a:gd name="connsiteX1" fmla="*/ 0 w 819302"/>
+              <a:gd name="connsiteY1" fmla="*/ 0 h 1024128"/>
+              <a:gd name="connsiteX2" fmla="*/ 819302 w 819302"/>
+              <a:gd name="connsiteY2" fmla="*/ 0 h 1024128"/>
+              <a:gd name="connsiteX3" fmla="*/ 819302 w 819302"/>
+              <a:gd name="connsiteY3" fmla="*/ 1024128 h 1024128"/>
+            </a:gdLst>
+            <a:ahLst/>
+            <a:cxnLst>
+              <a:cxn ang="0">
+                <a:pos x="connsiteX0" y="connsiteY0"/>
+              </a:cxn>
+              <a:cxn ang="0">
+                <a:pos x="connsiteX1" y="connsiteY1"/>
+              </a:cxn>
+              <a:cxn ang="0">
+                <a:pos x="connsiteX2" y="connsiteY2"/>
+              </a:cxn>
+              <a:cxn ang="0">
+                <a:pos x="connsiteX3" y="connsiteY3"/>
+              </a:cxn>
+            </a:cxnLst>
+            <a:rect l="l" t="t" r="r" b="b"/>
+            <a:pathLst>
+              <a:path w="819302" h="1024128">
+                <a:moveTo>
+                  <a:pt x="0" y="1024128"/>
+                </a:moveTo>
+                <a:lnTo>
+                  <a:pt x="0" y="0"/>
+                </a:lnTo>
+                <a:lnTo>
+                  <a:pt x="819302" y="0"/>
+                </a:lnTo>
+                <a:lnTo>
+                  <a:pt x="819302" y="1024128"/>
+                </a:lnTo>
+              </a:path>
+            </a:pathLst>
+          </a:custGeom>
+          <a:noFill/>
+          <a:ln w="153526" cap="flat">
+            <a:solidFill>
+              <a:srgbClr val="4D0DAB"/>
+            </a:solidFill>
+            <a:prstDash val="solid"/>
+            <a:round/>
+          </a:ln>
+        </p:spPr>
+        <p:txBody>
+          <a:bodyPr rtlCol="0" anchor="ctr"/>
+          <a:lstStyle/>
+          <a:p>
+            <a:endParaRPr lang="fr-FR"/>
+          </a:p>
+        </p:txBody>
+      </p:sp>
+      <p:sp>
+        <p:nvSpPr>
+          <p:cNvPr id="8" name="Forme libre : forme 7">
+            <a:extLst>
+              <a:ext uri="{FF2B5EF4-FFF2-40B4-BE49-F238E27FC236}">
+                <a16:creationId xmlns:a16="http://schemas.microsoft.com/office/drawing/2014/main" id="{D2C23EF8-79F5-A8C8-92DB-A0EEB50FA98C}"/>
+              </a:ext>
+            </a:extLst>
+          </p:cNvPr>
+          <p:cNvSpPr/>
+          <p:nvPr/>
+        </p:nvSpPr>
+        <p:spPr>
+          <a:xfrm>
+            <a:off x="7043165" y="2710282"/>
+            <a:ext cx="768096" cy="2560320"/>
+          </a:xfrm>
+          <a:custGeom>
+            <a:avLst/>
+            <a:gdLst>
+              <a:gd name="connsiteX0" fmla="*/ 0 w 768096"/>
+              <a:gd name="connsiteY0" fmla="*/ 0 h 2560320"/>
+              <a:gd name="connsiteX1" fmla="*/ 768096 w 768096"/>
+              <a:gd name="connsiteY1" fmla="*/ 0 h 2560320"/>
+              <a:gd name="connsiteX2" fmla="*/ 768096 w 768096"/>
+              <a:gd name="connsiteY2" fmla="*/ 2560320 h 2560320"/>
+              <a:gd name="connsiteX3" fmla="*/ 0 w 768096"/>
+              <a:gd name="connsiteY3" fmla="*/ 2560320 h 2560320"/>
+            </a:gdLst>
+            <a:ahLst/>
+            <a:cxnLst>
+              <a:cxn ang="0">
+                <a:pos x="connsiteX0" y="connsiteY0"/>
+              </a:cxn>
+              <a:cxn ang="0">
+                <a:pos x="connsiteX1" y="connsiteY1"/>
+              </a:cxn>
+              <a:cxn ang="0">
+                <a:pos x="connsiteX2" y="connsiteY2"/>
+              </a:cxn>
+              <a:cxn ang="0">
+                <a:pos x="connsiteX3" y="connsiteY3"/>
+              </a:cxn>
+            </a:cxnLst>
+            <a:rect l="l" t="t" r="r" b="b"/>
+            <a:pathLst>
+              <a:path w="768096" h="2560320">
+                <a:moveTo>
+                  <a:pt x="0" y="0"/>
+                </a:moveTo>
+                <a:lnTo>
+                  <a:pt x="768096" y="0"/>
+                </a:lnTo>
+                <a:lnTo>
+                  <a:pt x="768096" y="2560320"/>
+                </a:lnTo>
+                <a:lnTo>
+                  <a:pt x="0" y="2560320"/>
+                </a:lnTo>
+                <a:close/>
+              </a:path>
+            </a:pathLst>
+          </a:custGeom>
+          <a:solidFill>
+            <a:srgbClr val="BFBFBF"/>
+          </a:solidFill>
+          <a:ln w="51175" cap="flat">
+            <a:noFill/>
+            <a:prstDash val="solid"/>
+            <a:miter/>
+          </a:ln>
+        </p:spPr>
+        <p:txBody>
+          <a:bodyPr rtlCol="0" anchor="ctr"/>
+          <a:lstStyle/>
+          <a:p>
+            <a:endParaRPr lang="fr-FR"/>
+          </a:p>
+        </p:txBody>
+      </p:sp>
+      <p:sp>
+        <p:nvSpPr>
+          <p:cNvPr id="9" name="Forme libre : forme 8">
+            <a:extLst>
+              <a:ext uri="{FF2B5EF4-FFF2-40B4-BE49-F238E27FC236}">
+                <a16:creationId xmlns:a16="http://schemas.microsoft.com/office/drawing/2014/main" id="{1967CF16-2751-C61E-A161-70FD08B85F30}"/>
+              </a:ext>
+            </a:extLst>
+          </p:cNvPr>
+          <p:cNvSpPr/>
+          <p:nvPr/>
+        </p:nvSpPr>
+        <p:spPr>
+          <a:xfrm>
+            <a:off x="7811261" y="2710282"/>
+            <a:ext cx="768096" cy="2560320"/>
+          </a:xfrm>
+          <a:custGeom>
+            <a:avLst/>
+            <a:gdLst>
+              <a:gd name="connsiteX0" fmla="*/ 0 w 768096"/>
+              <a:gd name="connsiteY0" fmla="*/ 0 h 2560320"/>
+              <a:gd name="connsiteX1" fmla="*/ 768096 w 768096"/>
+              <a:gd name="connsiteY1" fmla="*/ 0 h 2560320"/>
+              <a:gd name="connsiteX2" fmla="*/ 768096 w 768096"/>
+              <a:gd name="connsiteY2" fmla="*/ 2560320 h 2560320"/>
+              <a:gd name="connsiteX3" fmla="*/ 0 w 768096"/>
+              <a:gd name="connsiteY3" fmla="*/ 2560320 h 2560320"/>
+            </a:gdLst>
+            <a:ahLst/>
+            <a:cxnLst>
+              <a:cxn ang="0">
+                <a:pos x="connsiteX0" y="connsiteY0"/>
+              </a:cxn>
+              <a:cxn ang="0">
+                <a:pos x="connsiteX1" y="connsiteY1"/>
+              </a:cxn>
+              <a:cxn ang="0">
+                <a:pos x="connsiteX2" y="connsiteY2"/>
+              </a:cxn>
+              <a:cxn ang="0">
+                <a:pos x="connsiteX3" y="connsiteY3"/>
+              </a:cxn>
+            </a:cxnLst>
+            <a:rect l="l" t="t" r="r" b="b"/>
+            <a:pathLst>
+              <a:path w="768096" h="2560320">
+                <a:moveTo>
+                  <a:pt x="0" y="0"/>
+                </a:moveTo>
+                <a:lnTo>
+                  <a:pt x="768096" y="0"/>
+                </a:lnTo>
+                <a:lnTo>
+                  <a:pt x="768096" y="2560320"/>
+                </a:lnTo>
+                <a:lnTo>
+                  <a:pt x="0" y="2560320"/>
+                </a:lnTo>
+                <a:close/>
+              </a:path>
+            </a:pathLst>
+          </a:custGeom>
+          <a:solidFill>
+            <a:srgbClr val="FEF6B6"/>
+          </a:solidFill>
+          <a:ln w="51175" cap="flat">
+            <a:noFill/>
+            <a:prstDash val="solid"/>
+            <a:miter/>
+          </a:ln>
+        </p:spPr>
+        <p:txBody>
+          <a:bodyPr rtlCol="0" anchor="ctr"/>
+          <a:lstStyle/>
+          <a:p>
+            <a:endParaRPr lang="fr-FR"/>
+          </a:p>
+        </p:txBody>
+      </p:sp>
+      <p:sp>
+        <p:nvSpPr>
+          <p:cNvPr id="10" name="Forme libre : forme 9">
+            <a:extLst>
+              <a:ext uri="{FF2B5EF4-FFF2-40B4-BE49-F238E27FC236}">
+                <a16:creationId xmlns:a16="http://schemas.microsoft.com/office/drawing/2014/main" id="{4AC45BF8-81AC-53C3-C5D9-CEA2DBCC7EDE}"/>
+              </a:ext>
+            </a:extLst>
+          </p:cNvPr>
+          <p:cNvSpPr/>
+          <p:nvPr/>
+        </p:nvSpPr>
+        <p:spPr>
+          <a:xfrm>
+            <a:off x="7811261" y="2710282"/>
+            <a:ext cx="51206" cy="2560320"/>
+          </a:xfrm>
+          <a:custGeom>
+            <a:avLst/>
+            <a:gdLst>
+              <a:gd name="connsiteX0" fmla="*/ 0 w 51206"/>
+              <a:gd name="connsiteY0" fmla="*/ 0 h 2560320"/>
+              <a:gd name="connsiteX1" fmla="*/ 0 w 51206"/>
+              <a:gd name="connsiteY1" fmla="*/ 2560320 h 2560320"/>
+            </a:gdLst>
+            <a:ahLst/>
+            <a:cxnLst>
+              <a:cxn ang="0">
+                <a:pos x="connsiteX0" y="connsiteY0"/>
+              </a:cxn>
+              <a:cxn ang="0">
+                <a:pos x="connsiteX1" y="connsiteY1"/>
+              </a:cxn>
+            </a:cxnLst>
+            <a:rect l="l" t="t" r="r" b="b"/>
+            <a:pathLst>
+              <a:path w="51206" h="2560320">
+                <a:moveTo>
+                  <a:pt x="0" y="0"/>
+                </a:moveTo>
+                <a:lnTo>
+                  <a:pt x="0" y="2560320"/>
+                </a:lnTo>
+              </a:path>
+            </a:pathLst>
+          </a:custGeom>
+          <a:solidFill>
+            <a:srgbClr val="000000"/>
+          </a:solidFill>
+          <a:ln w="127938" cap="flat">
+            <a:solidFill>
+              <a:srgbClr val="00294B"/>
+            </a:solidFill>
+            <a:custDash>
+              <a:ds d="300000" sp="300000"/>
+            </a:custDash>
+            <a:miter/>
+          </a:ln>
+        </p:spPr>
+        <p:txBody>
+          <a:bodyPr rtlCol="0" anchor="ctr"/>
+          <a:lstStyle/>
+          <a:p>
+            <a:endParaRPr lang="fr-FR"/>
+          </a:p>
+        </p:txBody>
+      </p:sp>
+      <p:sp>
+        <p:nvSpPr>
+          <p:cNvPr id="11" name="Forme libre : forme 10">
+            <a:extLst>
+              <a:ext uri="{FF2B5EF4-FFF2-40B4-BE49-F238E27FC236}">
+                <a16:creationId xmlns:a16="http://schemas.microsoft.com/office/drawing/2014/main" id="{BBB0256C-EFF2-6723-9E89-DC71407F451F}"/>
+              </a:ext>
+            </a:extLst>
+          </p:cNvPr>
+          <p:cNvSpPr/>
+          <p:nvPr/>
+        </p:nvSpPr>
+        <p:spPr>
+          <a:xfrm>
+            <a:off x="7043165" y="2710282"/>
+            <a:ext cx="1536192" cy="2560320"/>
+          </a:xfrm>
+          <a:custGeom>
+            <a:avLst/>
+            <a:gdLst>
+              <a:gd name="connsiteX0" fmla="*/ 0 w 1536192"/>
+              <a:gd name="connsiteY0" fmla="*/ 0 h 2560320"/>
+              <a:gd name="connsiteX1" fmla="*/ 1536192 w 1536192"/>
+              <a:gd name="connsiteY1" fmla="*/ 0 h 2560320"/>
+              <a:gd name="connsiteX2" fmla="*/ 1536192 w 1536192"/>
+              <a:gd name="connsiteY2" fmla="*/ 2560320 h 2560320"/>
+              <a:gd name="connsiteX3" fmla="*/ 0 w 1536192"/>
+              <a:gd name="connsiteY3" fmla="*/ 2560320 h 2560320"/>
+            </a:gdLst>
+            <a:ahLst/>
+            <a:cxnLst>
+              <a:cxn ang="0">
+                <a:pos x="connsiteX0" y="connsiteY0"/>
+              </a:cxn>
+              <a:cxn ang="0">
+                <a:pos x="connsiteX1" y="connsiteY1"/>
+              </a:cxn>
+              <a:cxn ang="0">
+                <a:pos x="connsiteX2" y="connsiteY2"/>
+              </a:cxn>
+              <a:cxn ang="0">
+                <a:pos x="connsiteX3" y="connsiteY3"/>
+              </a:cxn>
+            </a:cxnLst>
+            <a:rect l="l" t="t" r="r" b="b"/>
+            <a:pathLst>
+              <a:path w="1536192" h="2560320">
+                <a:moveTo>
+                  <a:pt x="0" y="0"/>
+                </a:moveTo>
+                <a:lnTo>
+                  <a:pt x="1536192" y="0"/>
+                </a:lnTo>
+                <a:lnTo>
+                  <a:pt x="1536192" y="2560320"/>
+                </a:lnTo>
+                <a:lnTo>
+                  <a:pt x="0" y="2560320"/>
+                </a:lnTo>
+                <a:close/>
+              </a:path>
+            </a:pathLst>
+          </a:custGeom>
+          <a:noFill/>
+          <a:ln w="179113" cap="flat">
+            <a:solidFill>
+              <a:srgbClr val="00294B"/>
+            </a:solidFill>
+            <a:prstDash val="solid"/>
+            <a:miter/>
+          </a:ln>
+        </p:spPr>
+        <p:txBody>
+          <a:bodyPr rtlCol="0" anchor="ctr"/>
+          <a:lstStyle/>
+          <a:p>
+            <a:endParaRPr lang="fr-FR"/>
+          </a:p>
+        </p:txBody>
+      </p:sp>
+      <p:sp>
+        <p:nvSpPr>
+          <p:cNvPr id="12" name="Forme libre : forme 11">
+            <a:extLst>
+              <a:ext uri="{FF2B5EF4-FFF2-40B4-BE49-F238E27FC236}">
+                <a16:creationId xmlns:a16="http://schemas.microsoft.com/office/drawing/2014/main" id="{46E57938-3CBC-64E1-163B-5FC640F6036F}"/>
+              </a:ext>
+            </a:extLst>
+          </p:cNvPr>
+          <p:cNvSpPr/>
+          <p:nvPr/>
+        </p:nvSpPr>
+        <p:spPr>
+          <a:xfrm>
+            <a:off x="5041392" y="2043459"/>
+            <a:ext cx="1408175" cy="509049"/>
+          </a:xfrm>
+          <a:custGeom>
+            <a:avLst/>
+            <a:gdLst>
+              <a:gd name="connsiteX0" fmla="*/ 0 w 1024128"/>
+              <a:gd name="connsiteY0" fmla="*/ 509049 h 509049"/>
+              <a:gd name="connsiteX1" fmla="*/ 1024128 w 1024128"/>
+              <a:gd name="connsiteY1" fmla="*/ 201811 h 509049"/>
+            </a:gdLst>
+            <a:ahLst/>
+            <a:cxnLst>
+              <a:cxn ang="0">
+                <a:pos x="connsiteX0" y="connsiteY0"/>
+              </a:cxn>
+              <a:cxn ang="0">
+                <a:pos x="connsiteX1" y="connsiteY1"/>
+              </a:cxn>
+            </a:cxnLst>
+            <a:rect l="l" t="t" r="r" b="b"/>
+            <a:pathLst>
+              <a:path w="1024128" h="509049">
+                <a:moveTo>
+                  <a:pt x="0" y="509049"/>
+                </a:moveTo>
+                <a:cubicBezTo>
+                  <a:pt x="358445" y="-105428"/>
+                  <a:pt x="819302" y="-105428"/>
+                  <a:pt x="1024128" y="201811"/>
+                </a:cubicBezTo>
+              </a:path>
+            </a:pathLst>
+          </a:custGeom>
+          <a:noFill/>
+          <a:ln w="179113" cap="rnd">
+            <a:solidFill>
+              <a:srgbClr val="4D0DAB"/>
+            </a:solidFill>
+            <a:prstDash val="solid"/>
+            <a:miter/>
+          </a:ln>
+        </p:spPr>
+        <p:txBody>
+          <a:bodyPr rtlCol="0" anchor="ctr"/>
+          <a:lstStyle/>
+          <a:p>
+            <a:endParaRPr lang="fr-FR"/>
+          </a:p>
+        </p:txBody>
+      </p:sp>
+      <p:sp>
+        <p:nvSpPr>
+          <p:cNvPr id="13" name="Forme libre : forme 12">
+            <a:extLst>
+              <a:ext uri="{FF2B5EF4-FFF2-40B4-BE49-F238E27FC236}">
+                <a16:creationId xmlns:a16="http://schemas.microsoft.com/office/drawing/2014/main" id="{FC859FC7-3527-4DB4-3FA0-8EBB2D8108AC}"/>
+              </a:ext>
+            </a:extLst>
+          </p:cNvPr>
+          <p:cNvSpPr/>
+          <p:nvPr/>
+        </p:nvSpPr>
+        <p:spPr>
+          <a:xfrm rot="1545748">
+            <a:off x="6449567" y="2091651"/>
+            <a:ext cx="358444" cy="460857"/>
+          </a:xfrm>
+          <a:custGeom>
+            <a:avLst/>
+            <a:gdLst>
+              <a:gd name="connsiteX0" fmla="*/ 51206 w 358444"/>
+              <a:gd name="connsiteY0" fmla="*/ 0 h 460857"/>
+              <a:gd name="connsiteX1" fmla="*/ 358445 w 358444"/>
+              <a:gd name="connsiteY1" fmla="*/ 256032 h 460857"/>
+              <a:gd name="connsiteX2" fmla="*/ 0 w 358444"/>
+              <a:gd name="connsiteY2" fmla="*/ 460858 h 460857"/>
+            </a:gdLst>
+            <a:ahLst/>
+            <a:cxnLst>
+              <a:cxn ang="0">
+                <a:pos x="connsiteX0" y="connsiteY0"/>
+              </a:cxn>
+              <a:cxn ang="0">
+                <a:pos x="connsiteX1" y="connsiteY1"/>
+              </a:cxn>
+              <a:cxn ang="0">
+                <a:pos x="connsiteX2" y="connsiteY2"/>
+              </a:cxn>
+            </a:cxnLst>
+            <a:rect l="l" t="t" r="r" b="b"/>
+            <a:pathLst>
+              <a:path w="358444" h="460857">
+                <a:moveTo>
+                  <a:pt x="51206" y="0"/>
+                </a:moveTo>
+                <a:lnTo>
+                  <a:pt x="358445" y="256032"/>
+                </a:lnTo>
+                <a:lnTo>
+                  <a:pt x="0" y="460858"/>
+                </a:lnTo>
+              </a:path>
+            </a:pathLst>
+          </a:custGeom>
+          <a:noFill/>
+          <a:ln w="179113" cap="rnd">
+            <a:solidFill>
+              <a:srgbClr val="4D0DAB"/>
+            </a:solidFill>
+            <a:prstDash val="solid"/>
+            <a:round/>
+          </a:ln>
+        </p:spPr>
+        <p:txBody>
+          <a:bodyPr rtlCol="0" anchor="ctr"/>
+          <a:lstStyle/>
+          <a:p>
+            <a:endParaRPr lang="fr-FR"/>
+          </a:p>
+        </p:txBody>
+      </p:sp>
+      <p:sp>
+        <p:nvSpPr>
+          <p:cNvPr id="14" name="Forme libre : forme 13">
+            <a:extLst>
+              <a:ext uri="{FF2B5EF4-FFF2-40B4-BE49-F238E27FC236}">
+                <a16:creationId xmlns:a16="http://schemas.microsoft.com/office/drawing/2014/main" id="{8F6CD644-3DE2-ED50-7568-8437BC25BE16}"/>
+              </a:ext>
+            </a:extLst>
+          </p:cNvPr>
+          <p:cNvSpPr/>
+          <p:nvPr/>
+        </p:nvSpPr>
+        <p:spPr>
+          <a:xfrm>
+            <a:off x="5815717" y="5669365"/>
+            <a:ext cx="1103019" cy="321416"/>
+          </a:xfrm>
+          <a:custGeom>
+            <a:avLst/>
+            <a:gdLst>
+              <a:gd name="connsiteX0" fmla="*/ 1024128 w 1024128"/>
+              <a:gd name="connsiteY0" fmla="*/ 0 h 321416"/>
+              <a:gd name="connsiteX1" fmla="*/ 0 w 1024128"/>
+              <a:gd name="connsiteY1" fmla="*/ 102413 h 321416"/>
+            </a:gdLst>
+            <a:ahLst/>
+            <a:cxnLst>
+              <a:cxn ang="0">
+                <a:pos x="connsiteX0" y="connsiteY0"/>
+              </a:cxn>
+              <a:cxn ang="0">
+                <a:pos x="connsiteX1" y="connsiteY1"/>
+              </a:cxn>
+            </a:cxnLst>
+            <a:rect l="l" t="t" r="r" b="b"/>
+            <a:pathLst>
+              <a:path w="1024128" h="321416">
+                <a:moveTo>
+                  <a:pt x="1024128" y="0"/>
+                </a:moveTo>
+                <a:cubicBezTo>
+                  <a:pt x="665683" y="409651"/>
+                  <a:pt x="204826" y="409651"/>
+                  <a:pt x="0" y="102413"/>
+                </a:cubicBezTo>
+              </a:path>
+            </a:pathLst>
+          </a:custGeom>
+          <a:noFill/>
+          <a:ln w="179113" cap="rnd">
+            <a:solidFill>
+              <a:srgbClr val="4D0DAB"/>
+            </a:solidFill>
+            <a:prstDash val="solid"/>
+            <a:miter/>
+          </a:ln>
+        </p:spPr>
+        <p:txBody>
+          <a:bodyPr rtlCol="0" anchor="ctr"/>
+          <a:lstStyle/>
+          <a:p>
+            <a:endParaRPr lang="fr-FR"/>
+          </a:p>
+        </p:txBody>
+      </p:sp>
+      <p:sp>
+        <p:nvSpPr>
+          <p:cNvPr id="15" name="Forme libre : forme 14">
+            <a:extLst>
+              <a:ext uri="{FF2B5EF4-FFF2-40B4-BE49-F238E27FC236}">
+                <a16:creationId xmlns:a16="http://schemas.microsoft.com/office/drawing/2014/main" id="{F849DA7E-4823-DFC5-11C9-995E415B2F34}"/>
+              </a:ext>
+            </a:extLst>
+          </p:cNvPr>
+          <p:cNvSpPr/>
+          <p:nvPr/>
+        </p:nvSpPr>
+        <p:spPr>
+          <a:xfrm rot="2228898">
+            <a:off x="5486924" y="5422589"/>
+            <a:ext cx="358444" cy="460857"/>
+          </a:xfrm>
+          <a:custGeom>
+            <a:avLst/>
+            <a:gdLst>
+              <a:gd name="connsiteX0" fmla="*/ 307238 w 358444"/>
+              <a:gd name="connsiteY0" fmla="*/ 460858 h 460857"/>
+              <a:gd name="connsiteX1" fmla="*/ 0 w 358444"/>
+              <a:gd name="connsiteY1" fmla="*/ 204826 h 460857"/>
+              <a:gd name="connsiteX2" fmla="*/ 358445 w 358444"/>
+              <a:gd name="connsiteY2" fmla="*/ 0 h 460857"/>
+            </a:gdLst>
+            <a:ahLst/>
+            <a:cxnLst>
+              <a:cxn ang="0">
+                <a:pos x="connsiteX0" y="connsiteY0"/>
+              </a:cxn>
+              <a:cxn ang="0">
+                <a:pos x="connsiteX1" y="connsiteY1"/>
+              </a:cxn>
+              <a:cxn ang="0">
+                <a:pos x="connsiteX2" y="connsiteY2"/>
+              </a:cxn>
+            </a:cxnLst>
+            <a:rect l="l" t="t" r="r" b="b"/>
+            <a:pathLst>
+              <a:path w="358444" h="460857">
+                <a:moveTo>
+                  <a:pt x="307238" y="460858"/>
+                </a:moveTo>
+                <a:lnTo>
+                  <a:pt x="0" y="204826"/>
+                </a:lnTo>
+                <a:lnTo>
+                  <a:pt x="358445" y="0"/>
+                </a:lnTo>
+              </a:path>
+            </a:pathLst>
+          </a:custGeom>
+          <a:noFill/>
+          <a:ln w="179113" cap="rnd">
+            <a:solidFill>
+              <a:srgbClr val="4D0DAB"/>
+            </a:solidFill>
+            <a:prstDash val="solid"/>
+            <a:round/>
+          </a:ln>
+        </p:spPr>
+        <p:txBody>
+          <a:bodyPr rtlCol="0" anchor="ctr"/>
+          <a:lstStyle/>
+          <a:p>
+            <a:endParaRPr lang="fr-FR"/>
+          </a:p>
+        </p:txBody>
+      </p:sp>
     </p:spTree>
   </p:cSld>
   <p:clrMapOvr>

--- a/assets/illustrations.pptx
+++ b/assets/illustrations.pptx
@@ -17,6 +17,11 @@
     <p:sldId id="265" r:id="rId11"/>
     <p:sldId id="266" r:id="rId12"/>
     <p:sldId id="267" r:id="rId13"/>
+    <p:sldId id="268" r:id="rId18"/>
+    <p:sldId id="269" r:id="rId19"/>
+    <p:sldId id="270" r:id="rId20"/>
+    <p:sldId id="271" r:id="rId21"/>
+    <p:sldId id="272" r:id="rId22"/>
   </p:sldIdLst>
   <p:sldSz cx="12192000" cy="6858000"/>
   <p:notesSz cx="6858000" cy="9144000"/>
@@ -4161,6 +4166,391 @@
         <p14:creationId xmlns:p14="http://schemas.microsoft.com/office/powerpoint/2010/main" val="2942038449"/>
       </p:ext>
     </p:extLst>
+  </p:cSld>
+  <p:clrMapOvr>
+    <a:masterClrMapping/>
+  </p:clrMapOvr>
+</p:sld>
+</file>
+
+<file path=ppt/slides/slide13.xml><?xml version="1.0" encoding="utf-8"?>
+<p:sld xmlns:a="http://schemas.openxmlformats.org/drawingml/2006/main" xmlns:p="http://schemas.openxmlformats.org/presentationml/2006/main" xmlns:r="http://schemas.openxmlformats.org/officeDocument/2006/relationships">
+  <p:cSld>
+    <p:spTree>
+      <p:nvGrpSpPr>
+        <p:cNvPr id="1" name=""/>
+        <p:cNvGrpSpPr/>
+        <p:nvPr/>
+      </p:nvGrpSpPr>
+      <p:grpSpPr/>
+      <p:sp>
+        <p:nvSpPr>
+          <p:cNvPr id="2" name="TextBox 1"/>
+          <p:cNvSpPr txBox="1"/>
+          <p:nvPr/>
+        </p:nvSpPr>
+        <p:spPr>
+          <a:xfrm>
+            <a:off x="457200" y="274320"/>
+            <a:ext cx="10972800" cy="731520"/>
+          </a:xfrm>
+          <a:prstGeom prst="rect">
+            <a:avLst/>
+          </a:prstGeom>
+          <a:noFill/>
+        </p:spPr>
+        <p:txBody>
+          <a:bodyPr wrap="square">
+            <a:spAutoFit/>
+          </a:bodyPr>
+          <a:lstStyle/>
+          <a:p>
+            <a:r>
+              <a:rPr sz="2400" b="1"/>
+              <a:t>assets/05-physical/governing.svg</a:t>
+            </a:r>
+          </a:p>
+        </p:txBody>
+      </p:sp>
+      <p:pic>
+        <p:nvPicPr>
+          <p:cNvPr id="3" name="Picture 2" descr="governing.svg"/>
+          <p:cNvPicPr>
+            <a:picLocks noChangeAspect="1"/>
+          </p:cNvPicPr>
+          <p:nvPr/>
+        </p:nvPicPr>
+        <p:blipFill>
+          <a:blip r:embed="rId2">
+            <a:extLst>
+              <a:ext uri="{96DAC541-7B7A-43D3-8B79-37D633B846F1}">
+                <asvg:svgBlip xmlns:asvg="http://schemas.microsoft.com/office/drawing/2016/SVG/main" r:embed="rId3"/>
+              </a:ext>
+            </a:extLst>
+          </a:blip>
+          <a:stretch>
+            <a:fillRect/>
+          </a:stretch>
+        </p:blipFill>
+        <p:spPr>
+          <a:xfrm>
+            <a:off x="4267200" y="1280160"/>
+            <a:ext cx="3657600" cy="5120640"/>
+          </a:xfrm>
+          <a:prstGeom prst="rect">
+            <a:avLst/>
+          </a:prstGeom>
+        </p:spPr>
+      </p:pic>
+    </p:spTree>
+  </p:cSld>
+  <p:clrMapOvr>
+    <a:masterClrMapping/>
+  </p:clrMapOvr>
+</p:sld>
+</file>
+
+<file path=ppt/slides/slide14.xml><?xml version="1.0" encoding="utf-8"?>
+<p:sld xmlns:a="http://schemas.openxmlformats.org/drawingml/2006/main" xmlns:p="http://schemas.openxmlformats.org/presentationml/2006/main" xmlns:r="http://schemas.openxmlformats.org/officeDocument/2006/relationships">
+  <p:cSld>
+    <p:spTree>
+      <p:nvGrpSpPr>
+        <p:cNvPr id="1" name=""/>
+        <p:cNvGrpSpPr/>
+        <p:nvPr/>
+      </p:nvGrpSpPr>
+      <p:grpSpPr/>
+      <p:sp>
+        <p:nvSpPr>
+          <p:cNvPr id="2" name="TextBox 1"/>
+          <p:cNvSpPr txBox="1"/>
+          <p:nvPr/>
+        </p:nvSpPr>
+        <p:spPr>
+          <a:xfrm>
+            <a:off x="457200" y="274320"/>
+            <a:ext cx="10972800" cy="731520"/>
+          </a:xfrm>
+          <a:prstGeom prst="rect">
+            <a:avLst/>
+          </a:prstGeom>
+          <a:noFill/>
+        </p:spPr>
+        <p:txBody>
+          <a:bodyPr wrap="square">
+            <a:spAutoFit/>
+          </a:bodyPr>
+          <a:lstStyle/>
+          <a:p>
+            <a:r>
+              <a:rPr sz="2400" b="1"/>
+              <a:t>assets/05-physical/external.svg</a:t>
+            </a:r>
+          </a:p>
+        </p:txBody>
+      </p:sp>
+      <p:pic>
+        <p:nvPicPr>
+          <p:cNvPr id="3" name="Picture 2" descr="external.svg"/>
+          <p:cNvPicPr>
+            <a:picLocks noChangeAspect="1"/>
+          </p:cNvPicPr>
+          <p:nvPr/>
+        </p:nvPicPr>
+        <p:blipFill>
+          <a:blip r:embed="rId2">
+            <a:extLst>
+              <a:ext uri="{96DAC541-7B7A-43D3-8B79-37D633B846F1}">
+                <asvg:svgBlip xmlns:asvg="http://schemas.microsoft.com/office/drawing/2016/SVG/main" r:embed="rId3"/>
+              </a:ext>
+            </a:extLst>
+          </a:blip>
+          <a:stretch>
+            <a:fillRect/>
+          </a:stretch>
+        </p:blipFill>
+        <p:spPr>
+          <a:xfrm>
+            <a:off x="3901440" y="1280160"/>
+            <a:ext cx="4389120" cy="5120640"/>
+          </a:xfrm>
+          <a:prstGeom prst="rect">
+            <a:avLst/>
+          </a:prstGeom>
+        </p:spPr>
+      </p:pic>
+    </p:spTree>
+  </p:cSld>
+  <p:clrMapOvr>
+    <a:masterClrMapping/>
+  </p:clrMapOvr>
+</p:sld>
+</file>
+
+<file path=ppt/slides/slide15.xml><?xml version="1.0" encoding="utf-8"?>
+<p:sld xmlns:a="http://schemas.openxmlformats.org/drawingml/2006/main" xmlns:p="http://schemas.openxmlformats.org/presentationml/2006/main" xmlns:r="http://schemas.openxmlformats.org/officeDocument/2006/relationships">
+  <p:cSld>
+    <p:spTree>
+      <p:nvGrpSpPr>
+        <p:cNvPr id="1" name=""/>
+        <p:cNvGrpSpPr/>
+        <p:nvPr/>
+      </p:nvGrpSpPr>
+      <p:grpSpPr/>
+      <p:sp>
+        <p:nvSpPr>
+          <p:cNvPr id="2" name="TextBox 1"/>
+          <p:cNvSpPr txBox="1"/>
+          <p:nvPr/>
+        </p:nvSpPr>
+        <p:spPr>
+          <a:xfrm>
+            <a:off x="457200" y="274320"/>
+            <a:ext cx="10972800" cy="731520"/>
+          </a:xfrm>
+          <a:prstGeom prst="rect">
+            <a:avLst/>
+          </a:prstGeom>
+          <a:noFill/>
+        </p:spPr>
+        <p:txBody>
+          <a:bodyPr wrap="square">
+            <a:spAutoFit/>
+          </a:bodyPr>
+          <a:lstStyle/>
+          <a:p>
+            <a:r>
+              <a:rPr sz="2400" b="1"/>
+              <a:t>assets/05-physical/radiation-sw.svg</a:t>
+            </a:r>
+          </a:p>
+        </p:txBody>
+      </p:sp>
+      <p:pic>
+        <p:nvPicPr>
+          <p:cNvPr id="3" name="Picture 2" descr="radiation-sw.svg"/>
+          <p:cNvPicPr>
+            <a:picLocks noChangeAspect="1"/>
+          </p:cNvPicPr>
+          <p:nvPr/>
+        </p:nvPicPr>
+        <p:blipFill>
+          <a:blip r:embed="rId2">
+            <a:extLst>
+              <a:ext uri="{96DAC541-7B7A-43D3-8B79-37D633B846F1}">
+                <asvg:svgBlip xmlns:asvg="http://schemas.microsoft.com/office/drawing/2016/SVG/main" r:embed="rId3"/>
+              </a:ext>
+            </a:extLst>
+          </a:blip>
+          <a:stretch>
+            <a:fillRect/>
+          </a:stretch>
+        </p:blipFill>
+        <p:spPr>
+          <a:xfrm>
+            <a:off x="2827506" y="1280160"/>
+            <a:ext cx="6536987" cy="5120640"/>
+          </a:xfrm>
+          <a:prstGeom prst="rect">
+            <a:avLst/>
+          </a:prstGeom>
+        </p:spPr>
+      </p:pic>
+    </p:spTree>
+  </p:cSld>
+  <p:clrMapOvr>
+    <a:masterClrMapping/>
+  </p:clrMapOvr>
+</p:sld>
+</file>
+
+<file path=ppt/slides/slide16.xml><?xml version="1.0" encoding="utf-8"?>
+<p:sld xmlns:a="http://schemas.openxmlformats.org/drawingml/2006/main" xmlns:p="http://schemas.openxmlformats.org/presentationml/2006/main" xmlns:r="http://schemas.openxmlformats.org/officeDocument/2006/relationships">
+  <p:cSld>
+    <p:spTree>
+      <p:nvGrpSpPr>
+        <p:cNvPr id="1" name=""/>
+        <p:cNvGrpSpPr/>
+        <p:nvPr/>
+      </p:nvGrpSpPr>
+      <p:grpSpPr/>
+      <p:sp>
+        <p:nvSpPr>
+          <p:cNvPr id="2" name="TextBox 1"/>
+          <p:cNvSpPr txBox="1"/>
+          <p:nvPr/>
+        </p:nvSpPr>
+        <p:spPr>
+          <a:xfrm>
+            <a:off x="457200" y="274320"/>
+            <a:ext cx="10972800" cy="731520"/>
+          </a:xfrm>
+          <a:prstGeom prst="rect">
+            <a:avLst/>
+          </a:prstGeom>
+          <a:noFill/>
+        </p:spPr>
+        <p:txBody>
+          <a:bodyPr wrap="square">
+            <a:spAutoFit/>
+          </a:bodyPr>
+          <a:lstStyle/>
+          <a:p>
+            <a:r>
+              <a:rPr sz="2400" b="1"/>
+              <a:t>assets/05-physical/radiation-lw.svg</a:t>
+            </a:r>
+          </a:p>
+        </p:txBody>
+      </p:sp>
+      <p:pic>
+        <p:nvPicPr>
+          <p:cNvPr id="3" name="Picture 2" descr="radiation-lw.svg"/>
+          <p:cNvPicPr>
+            <a:picLocks noChangeAspect="1"/>
+          </p:cNvPicPr>
+          <p:nvPr/>
+        </p:nvPicPr>
+        <p:blipFill>
+          <a:blip r:embed="rId2">
+            <a:extLst>
+              <a:ext uri="{96DAC541-7B7A-43D3-8B79-37D633B846F1}">
+                <asvg:svgBlip xmlns:asvg="http://schemas.microsoft.com/office/drawing/2016/SVG/main" r:embed="rId3"/>
+              </a:ext>
+            </a:extLst>
+          </a:blip>
+          <a:stretch>
+            <a:fillRect/>
+          </a:stretch>
+        </p:blipFill>
+        <p:spPr>
+          <a:xfrm>
+            <a:off x="2827506" y="1280160"/>
+            <a:ext cx="6536987" cy="5120640"/>
+          </a:xfrm>
+          <a:prstGeom prst="rect">
+            <a:avLst/>
+          </a:prstGeom>
+        </p:spPr>
+      </p:pic>
+    </p:spTree>
+  </p:cSld>
+  <p:clrMapOvr>
+    <a:masterClrMapping/>
+  </p:clrMapOvr>
+</p:sld>
+</file>
+
+<file path=ppt/slides/slide17.xml><?xml version="1.0" encoding="utf-8"?>
+<p:sld xmlns:a="http://schemas.openxmlformats.org/drawingml/2006/main" xmlns:p="http://schemas.openxmlformats.org/presentationml/2006/main" xmlns:r="http://schemas.openxmlformats.org/officeDocument/2006/relationships">
+  <p:cSld>
+    <p:spTree>
+      <p:nvGrpSpPr>
+        <p:cNvPr id="1" name=""/>
+        <p:cNvGrpSpPr/>
+        <p:nvPr/>
+      </p:nvGrpSpPr>
+      <p:grpSpPr/>
+      <p:sp>
+        <p:nvSpPr>
+          <p:cNvPr id="2" name="TextBox 1"/>
+          <p:cNvSpPr txBox="1"/>
+          <p:nvPr/>
+        </p:nvSpPr>
+        <p:spPr>
+          <a:xfrm>
+            <a:off x="457200" y="274320"/>
+            <a:ext cx="10972800" cy="731520"/>
+          </a:xfrm>
+          <a:prstGeom prst="rect">
+            <a:avLst/>
+          </a:prstGeom>
+          <a:noFill/>
+        </p:spPr>
+        <p:txBody>
+          <a:bodyPr wrap="square">
+            <a:spAutoFit/>
+          </a:bodyPr>
+          <a:lstStyle/>
+          <a:p>
+            <a:r>
+              <a:rPr sz="2400" b="1"/>
+              <a:t>assets/05-physical/internal.svg</a:t>
+            </a:r>
+          </a:p>
+        </p:txBody>
+      </p:sp>
+      <p:pic>
+        <p:nvPicPr>
+          <p:cNvPr id="3" name="Picture 2" descr="internal.svg"/>
+          <p:cNvPicPr>
+            <a:picLocks noChangeAspect="1"/>
+          </p:cNvPicPr>
+          <p:nvPr/>
+        </p:nvPicPr>
+        <p:blipFill>
+          <a:blip r:embed="rId2">
+            <a:extLst>
+              <a:ext uri="{96DAC541-7B7A-43D3-8B79-37D633B846F1}">
+                <asvg:svgBlip xmlns:asvg="http://schemas.microsoft.com/office/drawing/2016/SVG/main" r:embed="rId3"/>
+              </a:ext>
+            </a:extLst>
+          </a:blip>
+          <a:stretch>
+            <a:fillRect/>
+          </a:stretch>
+        </p:blipFill>
+        <p:spPr>
+          <a:xfrm>
+            <a:off x="3580598" y="1280160"/>
+            <a:ext cx="5030804" cy="5120640"/>
+          </a:xfrm>
+          <a:prstGeom prst="rect">
+            <a:avLst/>
+          </a:prstGeom>
+        </p:spPr>
+      </p:pic>
+    </p:spTree>
   </p:cSld>
   <p:clrMapOvr>
     <a:masterClrMapping/>

--- a/assets/illustrations.pptx
+++ b/assets/illustrations.pptx
@@ -3183,13 +3183,13 @@
           <a:p>
             <a:r>
               <a:rPr sz="1800" b="0"/>
-              <a:t>4. Save it over the file named in the slide title, in the folder assets/icons/ of the presentation.</a:t>
+              <a:t>4. Save it over the file named in the slide title (the path is relative to the presentation folder).</a:t>
             </a:r>
           </a:p>
           <a:p>
             <a:r>
               <a:rPr sz="1800" b="0"/>
-              <a:t>5. Run  python build.py  (or keep  python build.py --watch  running) and refresh the browser.</a:t>
+              <a:t>5. Run  python config/build.py  (or keep  python config/build.py --watch  running) and refresh the browser.</a:t>
             </a:r>
           </a:p>
           <a:p>
@@ -3252,7 +3252,7 @@
           <a:p>
             <a:r>
               <a:rPr sz="2400" b="1"/>
-              <a:t>assets/icons/toc-introduction.svg</a:t>
+              <a:t>assets/03-contents/toc-introduction.svg</a:t>
             </a:r>
           </a:p>
         </p:txBody>
@@ -3336,7 +3336,7 @@
           <a:p>
             <a:r>
               <a:rPr sz="2400" b="1"/>
-              <a:t>assets/icons/toc-physical.svg</a:t>
+              <a:t>assets/03-contents/toc-physical.svg</a:t>
             </a:r>
           </a:p>
         </p:txBody>
@@ -4599,7 +4599,7 @@
           <a:p>
             <a:r>
               <a:rPr sz="2400" b="1"/>
-              <a:t>assets/icons/sota-building.svg</a:t>
+              <a:t>assets/04-introduction/sota-building.svg</a:t>
             </a:r>
           </a:p>
         </p:txBody>
@@ -4988,7 +4988,7 @@
           <a:p>
             <a:r>
               <a:rPr sz="2400" b="1"/>
-              <a:t>assets/icons/sota-material.svg</a:t>
+              <a:t>assets/04-introduction/sota-material.svg</a:t>
             </a:r>
           </a:p>
         </p:txBody>
@@ -5072,7 +5072,7 @@
           <a:p>
             <a:r>
               <a:rPr sz="2400" b="1"/>
-              <a:t>assets/icons/sota-wall.svg</a:t>
+              <a:t>assets/04-introduction/sota-wall.svg</a:t>
             </a:r>
           </a:p>
         </p:txBody>
@@ -5156,7 +5156,7 @@
           <a:p>
             <a:r>
               <a:rPr sz="2400" b="1"/>
-              <a:t>assets/icons/tech-cavities.svg</a:t>
+              <a:t>assets/04-introduction/tech-cavities.svg</a:t>
             </a:r>
           </a:p>
         </p:txBody>
@@ -5240,7 +5240,7 @@
           <a:p>
             <a:r>
               <a:rPr sz="2400" b="1"/>
-              <a:t>assets/icons/tech-lattice.svg</a:t>
+              <a:t>assets/04-introduction/tech-lattice.svg</a:t>
             </a:r>
           </a:p>
         </p:txBody>
@@ -5324,7 +5324,7 @@
           <a:p>
             <a:r>
               <a:rPr sz="2400" b="1"/>
-              <a:t>assets/icons/tech-multimaterial.svg</a:t>
+              <a:t>assets/04-introduction/tech-multimaterial.svg</a:t>
             </a:r>
           </a:p>
         </p:txBody>
@@ -5408,7 +5408,7 @@
           <a:p>
             <a:r>
               <a:rPr sz="2400" b="1"/>
-              <a:t>assets/icons/toc-conclusion.svg</a:t>
+              <a:t>assets/03-contents/toc-conclusion.svg</a:t>
             </a:r>
           </a:p>
         </p:txBody>
@@ -5492,7 +5492,7 @@
           <a:p>
             <a:r>
               <a:rPr sz="2400" b="1"/>
-              <a:t>assets/icons/toc-cosimulation.svg</a:t>
+              <a:t>assets/03-contents/toc-cosimulation.svg</a:t>
             </a:r>
           </a:p>
         </p:txBody>

--- a/assets/illustrations.pptx
+++ b/assets/illustrations.pptx
@@ -22,6 +22,11 @@
     <p:sldId id="270" r:id="rId20"/>
     <p:sldId id="271" r:id="rId21"/>
     <p:sldId id="272" r:id="rId22"/>
+    <p:sldId id="273" r:id="rId23"/>
+    <p:sldId id="274" r:id="rId24"/>
+    <p:sldId id="275" r:id="rId25"/>
+    <p:sldId id="276" r:id="rId26"/>
+    <p:sldId id="277" r:id="rId27"/>
   </p:sldIdLst>
   <p:sldSz cx="12192000" cy="6858000"/>
   <p:notesSz cx="6858000" cy="9144000"/>
@@ -4207,14 +4212,14 @@
           <a:p>
             <a:r>
               <a:rPr sz="2400" b="1"/>
-              <a:t>assets/05-physical/governing.svg</a:t>
+              <a:t>assets/05-physical/governing-boundaries-faint.svg</a:t>
             </a:r>
           </a:p>
         </p:txBody>
       </p:sp>
       <p:pic>
         <p:nvPicPr>
-          <p:cNvPr id="3" name="Picture 2" descr="governing.svg"/>
+          <p:cNvPr id="3" name="Picture 2" descr="governing-boundaries-faint.svg"/>
           <p:cNvPicPr>
             <a:picLocks noChangeAspect="1"/>
           </p:cNvPicPr>
@@ -4284,14 +4289,14 @@
           <a:p>
             <a:r>
               <a:rPr sz="2400" b="1"/>
-              <a:t>assets/05-physical/external.svg</a:t>
+              <a:t>assets/05-physical/governing-boundaries-bold.svg</a:t>
             </a:r>
           </a:p>
         </p:txBody>
       </p:sp>
       <p:pic>
         <p:nvPicPr>
-          <p:cNvPr id="3" name="Picture 2" descr="external.svg"/>
+          <p:cNvPr id="3" name="Picture 2" descr="governing-boundaries-bold.svg"/>
           <p:cNvPicPr>
             <a:picLocks noChangeAspect="1"/>
           </p:cNvPicPr>
@@ -4311,8 +4316,8 @@
         </p:blipFill>
         <p:spPr>
           <a:xfrm>
-            <a:off x="3901440" y="1280160"/>
-            <a:ext cx="4389120" cy="5120640"/>
+            <a:off x="4267200" y="1280160"/>
+            <a:ext cx="3657600" cy="5120640"/>
           </a:xfrm>
           <a:prstGeom prst="rect">
             <a:avLst/>
@@ -4328,6 +4333,237 @@
 </file>
 
 <file path=ppt/slides/slide15.xml><?xml version="1.0" encoding="utf-8"?>
+<p:sld xmlns:a="http://schemas.openxmlformats.org/drawingml/2006/main" xmlns:p="http://schemas.openxmlformats.org/presentationml/2006/main" xmlns:r="http://schemas.openxmlformats.org/officeDocument/2006/relationships">
+  <p:cSld>
+    <p:spTree>
+      <p:nvGrpSpPr>
+        <p:cNvPr id="1" name=""/>
+        <p:cNvGrpSpPr/>
+        <p:nvPr/>
+      </p:nvGrpSpPr>
+      <p:grpSpPr/>
+      <p:sp>
+        <p:nvSpPr>
+          <p:cNvPr id="2" name="TextBox 1"/>
+          <p:cNvSpPr txBox="1"/>
+          <p:nvPr/>
+        </p:nvSpPr>
+        <p:spPr>
+          <a:xfrm>
+            <a:off x="457200" y="274320"/>
+            <a:ext cx="10972800" cy="731520"/>
+          </a:xfrm>
+          <a:prstGeom prst="rect">
+            <a:avLst/>
+          </a:prstGeom>
+          <a:noFill/>
+        </p:spPr>
+        <p:txBody>
+          <a:bodyPr wrap="square">
+            <a:spAutoFit/>
+          </a:bodyPr>
+          <a:lstStyle/>
+          <a:p>
+            <a:r>
+              <a:rPr sz="2400" b="1"/>
+              <a:t>assets/05-physical/governing-normals.svg</a:t>
+            </a:r>
+          </a:p>
+        </p:txBody>
+      </p:sp>
+      <p:pic>
+        <p:nvPicPr>
+          <p:cNvPr id="3" name="Picture 2" descr="governing-normals.svg"/>
+          <p:cNvPicPr>
+            <a:picLocks noChangeAspect="1"/>
+          </p:cNvPicPr>
+          <p:nvPr/>
+        </p:nvPicPr>
+        <p:blipFill>
+          <a:blip r:embed="rId2">
+            <a:extLst>
+              <a:ext uri="{96DAC541-7B7A-43D3-8B79-37D633B846F1}">
+                <asvg:svgBlip xmlns:asvg="http://schemas.microsoft.com/office/drawing/2016/SVG/main" r:embed="rId3"/>
+              </a:ext>
+            </a:extLst>
+          </a:blip>
+          <a:stretch>
+            <a:fillRect/>
+          </a:stretch>
+        </p:blipFill>
+        <p:spPr>
+          <a:xfrm>
+            <a:off x="4267200" y="1280160"/>
+            <a:ext cx="3657600" cy="5120640"/>
+          </a:xfrm>
+          <a:prstGeom prst="rect">
+            <a:avLst/>
+          </a:prstGeom>
+        </p:spPr>
+      </p:pic>
+    </p:spTree>
+  </p:cSld>
+  <p:clrMapOvr>
+    <a:masterClrMapping/>
+  </p:clrMapOvr>
+</p:sld>
+</file>
+
+<file path=ppt/slides/slide16.xml><?xml version="1.0" encoding="utf-8"?>
+<p:sld xmlns:a="http://schemas.openxmlformats.org/drawingml/2006/main" xmlns:p="http://schemas.openxmlformats.org/presentationml/2006/main" xmlns:r="http://schemas.openxmlformats.org/officeDocument/2006/relationships">
+  <p:cSld>
+    <p:spTree>
+      <p:nvGrpSpPr>
+        <p:cNvPr id="1" name=""/>
+        <p:cNvGrpSpPr/>
+        <p:nvPr/>
+      </p:nvGrpSpPr>
+      <p:grpSpPr/>
+      <p:sp>
+        <p:nvSpPr>
+          <p:cNvPr id="2" name="TextBox 1"/>
+          <p:cNvSpPr txBox="1"/>
+          <p:nvPr/>
+        </p:nvSpPr>
+        <p:spPr>
+          <a:xfrm>
+            <a:off x="457200" y="274320"/>
+            <a:ext cx="10972800" cy="731520"/>
+          </a:xfrm>
+          <a:prstGeom prst="rect">
+            <a:avLst/>
+          </a:prstGeom>
+          <a:noFill/>
+        </p:spPr>
+        <p:txBody>
+          <a:bodyPr wrap="square">
+            <a:spAutoFit/>
+          </a:bodyPr>
+          <a:lstStyle/>
+          <a:p>
+            <a:r>
+              <a:rPr sz="2400" b="1"/>
+              <a:t>assets/05-physical/external-convection.svg</a:t>
+            </a:r>
+          </a:p>
+        </p:txBody>
+      </p:sp>
+      <p:pic>
+        <p:nvPicPr>
+          <p:cNvPr id="3" name="Picture 2" descr="external-convection.svg"/>
+          <p:cNvPicPr>
+            <a:picLocks noChangeAspect="1"/>
+          </p:cNvPicPr>
+          <p:nvPr/>
+        </p:nvPicPr>
+        <p:blipFill>
+          <a:blip r:embed="rId2">
+            <a:extLst>
+              <a:ext uri="{96DAC541-7B7A-43D3-8B79-37D633B846F1}">
+                <asvg:svgBlip xmlns:asvg="http://schemas.microsoft.com/office/drawing/2016/SVG/main" r:embed="rId3"/>
+              </a:ext>
+            </a:extLst>
+          </a:blip>
+          <a:stretch>
+            <a:fillRect/>
+          </a:stretch>
+        </p:blipFill>
+        <p:spPr>
+          <a:xfrm>
+            <a:off x="3901440" y="1280160"/>
+            <a:ext cx="4389120" cy="5120640"/>
+          </a:xfrm>
+          <a:prstGeom prst="rect">
+            <a:avLst/>
+          </a:prstGeom>
+        </p:spPr>
+      </p:pic>
+    </p:spTree>
+  </p:cSld>
+  <p:clrMapOvr>
+    <a:masterClrMapping/>
+  </p:clrMapOvr>
+</p:sld>
+</file>
+
+<file path=ppt/slides/slide17.xml><?xml version="1.0" encoding="utf-8"?>
+<p:sld xmlns:a="http://schemas.openxmlformats.org/drawingml/2006/main" xmlns:p="http://schemas.openxmlformats.org/presentationml/2006/main" xmlns:r="http://schemas.openxmlformats.org/officeDocument/2006/relationships">
+  <p:cSld>
+    <p:spTree>
+      <p:nvGrpSpPr>
+        <p:cNvPr id="1" name=""/>
+        <p:cNvGrpSpPr/>
+        <p:nvPr/>
+      </p:nvGrpSpPr>
+      <p:grpSpPr/>
+      <p:sp>
+        <p:nvSpPr>
+          <p:cNvPr id="2" name="TextBox 1"/>
+          <p:cNvSpPr txBox="1"/>
+          <p:nvPr/>
+        </p:nvSpPr>
+        <p:spPr>
+          <a:xfrm>
+            <a:off x="457200" y="274320"/>
+            <a:ext cx="10972800" cy="731520"/>
+          </a:xfrm>
+          <a:prstGeom prst="rect">
+            <a:avLst/>
+          </a:prstGeom>
+          <a:noFill/>
+        </p:spPr>
+        <p:txBody>
+          <a:bodyPr wrap="square">
+            <a:spAutoFit/>
+          </a:bodyPr>
+          <a:lstStyle/>
+          <a:p>
+            <a:r>
+              <a:rPr sz="2400" b="1"/>
+              <a:t>assets/05-physical/external-radiation.svg</a:t>
+            </a:r>
+          </a:p>
+        </p:txBody>
+      </p:sp>
+      <p:pic>
+        <p:nvPicPr>
+          <p:cNvPr id="3" name="Picture 2" descr="external-radiation.svg"/>
+          <p:cNvPicPr>
+            <a:picLocks noChangeAspect="1"/>
+          </p:cNvPicPr>
+          <p:nvPr/>
+        </p:nvPicPr>
+        <p:blipFill>
+          <a:blip r:embed="rId2">
+            <a:extLst>
+              <a:ext uri="{96DAC541-7B7A-43D3-8B79-37D633B846F1}">
+                <asvg:svgBlip xmlns:asvg="http://schemas.microsoft.com/office/drawing/2016/SVG/main" r:embed="rId3"/>
+              </a:ext>
+            </a:extLst>
+          </a:blip>
+          <a:stretch>
+            <a:fillRect/>
+          </a:stretch>
+        </p:blipFill>
+        <p:spPr>
+          <a:xfrm>
+            <a:off x="3901440" y="1280160"/>
+            <a:ext cx="4389120" cy="5120640"/>
+          </a:xfrm>
+          <a:prstGeom prst="rect">
+            <a:avLst/>
+          </a:prstGeom>
+        </p:spPr>
+      </p:pic>
+    </p:spTree>
+  </p:cSld>
+  <p:clrMapOvr>
+    <a:masterClrMapping/>
+  </p:clrMapOvr>
+</p:sld>
+</file>
+
+<file path=ppt/slides/slide18.xml><?xml version="1.0" encoding="utf-8"?>
 <p:sld xmlns:a="http://schemas.openxmlformats.org/drawingml/2006/main" xmlns:p="http://schemas.openxmlformats.org/presentationml/2006/main" xmlns:r="http://schemas.openxmlformats.org/officeDocument/2006/relationships">
   <p:cSld>
     <p:spTree>
@@ -4404,7 +4640,7 @@
 </p:sld>
 </file>
 
-<file path=ppt/slides/slide16.xml><?xml version="1.0" encoding="utf-8"?>
+<file path=ppt/slides/slide19.xml><?xml version="1.0" encoding="utf-8"?>
 <p:sld xmlns:a="http://schemas.openxmlformats.org/drawingml/2006/main" xmlns:p="http://schemas.openxmlformats.org/presentationml/2006/main" xmlns:r="http://schemas.openxmlformats.org/officeDocument/2006/relationships">
   <p:cSld>
     <p:spTree>
@@ -4467,83 +4703,6 @@
           <a:xfrm>
             <a:off x="2827506" y="1280160"/>
             <a:ext cx="6536987" cy="5120640"/>
-          </a:xfrm>
-          <a:prstGeom prst="rect">
-            <a:avLst/>
-          </a:prstGeom>
-        </p:spPr>
-      </p:pic>
-    </p:spTree>
-  </p:cSld>
-  <p:clrMapOvr>
-    <a:masterClrMapping/>
-  </p:clrMapOvr>
-</p:sld>
-</file>
-
-<file path=ppt/slides/slide17.xml><?xml version="1.0" encoding="utf-8"?>
-<p:sld xmlns:a="http://schemas.openxmlformats.org/drawingml/2006/main" xmlns:p="http://schemas.openxmlformats.org/presentationml/2006/main" xmlns:r="http://schemas.openxmlformats.org/officeDocument/2006/relationships">
-  <p:cSld>
-    <p:spTree>
-      <p:nvGrpSpPr>
-        <p:cNvPr id="1" name=""/>
-        <p:cNvGrpSpPr/>
-        <p:nvPr/>
-      </p:nvGrpSpPr>
-      <p:grpSpPr/>
-      <p:sp>
-        <p:nvSpPr>
-          <p:cNvPr id="2" name="TextBox 1"/>
-          <p:cNvSpPr txBox="1"/>
-          <p:nvPr/>
-        </p:nvSpPr>
-        <p:spPr>
-          <a:xfrm>
-            <a:off x="457200" y="274320"/>
-            <a:ext cx="10972800" cy="731520"/>
-          </a:xfrm>
-          <a:prstGeom prst="rect">
-            <a:avLst/>
-          </a:prstGeom>
-          <a:noFill/>
-        </p:spPr>
-        <p:txBody>
-          <a:bodyPr wrap="square">
-            <a:spAutoFit/>
-          </a:bodyPr>
-          <a:lstStyle/>
-          <a:p>
-            <a:r>
-              <a:rPr sz="2400" b="1"/>
-              <a:t>assets/05-physical/internal.svg</a:t>
-            </a:r>
-          </a:p>
-        </p:txBody>
-      </p:sp>
-      <p:pic>
-        <p:nvPicPr>
-          <p:cNvPr id="3" name="Picture 2" descr="internal.svg"/>
-          <p:cNvPicPr>
-            <a:picLocks noChangeAspect="1"/>
-          </p:cNvPicPr>
-          <p:nvPr/>
-        </p:nvPicPr>
-        <p:blipFill>
-          <a:blip r:embed="rId2">
-            <a:extLst>
-              <a:ext uri="{96DAC541-7B7A-43D3-8B79-37D633B846F1}">
-                <asvg:svgBlip xmlns:asvg="http://schemas.microsoft.com/office/drawing/2016/SVG/main" r:embed="rId3"/>
-              </a:ext>
-            </a:extLst>
-          </a:blip>
-          <a:stretch>
-            <a:fillRect/>
-          </a:stretch>
-        </p:blipFill>
-        <p:spPr>
-          <a:xfrm>
-            <a:off x="3580598" y="1280160"/>
-            <a:ext cx="5030804" cy="5120640"/>
           </a:xfrm>
           <a:prstGeom prst="rect">
             <a:avLst/>
@@ -4939,6 +5098,237 @@
           </a:p>
         </p:txBody>
       </p:sp>
+    </p:spTree>
+  </p:cSld>
+  <p:clrMapOvr>
+    <a:masterClrMapping/>
+  </p:clrMapOvr>
+</p:sld>
+</file>
+
+<file path=ppt/slides/slide20.xml><?xml version="1.0" encoding="utf-8"?>
+<p:sld xmlns:a="http://schemas.openxmlformats.org/drawingml/2006/main" xmlns:p="http://schemas.openxmlformats.org/presentationml/2006/main" xmlns:r="http://schemas.openxmlformats.org/officeDocument/2006/relationships">
+  <p:cSld>
+    <p:spTree>
+      <p:nvGrpSpPr>
+        <p:cNvPr id="1" name=""/>
+        <p:cNvGrpSpPr/>
+        <p:nvPr/>
+      </p:nvGrpSpPr>
+      <p:grpSpPr/>
+      <p:sp>
+        <p:nvSpPr>
+          <p:cNvPr id="2" name="TextBox 1"/>
+          <p:cNvSpPr txBox="1"/>
+          <p:nvPr/>
+        </p:nvSpPr>
+        <p:spPr>
+          <a:xfrm>
+            <a:off x="457200" y="274320"/>
+            <a:ext cx="10972800" cy="731520"/>
+          </a:xfrm>
+          <a:prstGeom prst="rect">
+            <a:avLst/>
+          </a:prstGeom>
+          <a:noFill/>
+        </p:spPr>
+        <p:txBody>
+          <a:bodyPr wrap="square">
+            <a:spAutoFit/>
+          </a:bodyPr>
+          <a:lstStyle/>
+          <a:p>
+            <a:r>
+              <a:rPr sz="2400" b="1"/>
+              <a:t>assets/05-physical/internal-convection.svg</a:t>
+            </a:r>
+          </a:p>
+        </p:txBody>
+      </p:sp>
+      <p:pic>
+        <p:nvPicPr>
+          <p:cNvPr id="3" name="Picture 2" descr="internal-convection.svg"/>
+          <p:cNvPicPr>
+            <a:picLocks noChangeAspect="1"/>
+          </p:cNvPicPr>
+          <p:nvPr/>
+        </p:nvPicPr>
+        <p:blipFill>
+          <a:blip r:embed="rId2">
+            <a:extLst>
+              <a:ext uri="{96DAC541-7B7A-43D3-8B79-37D633B846F1}">
+                <asvg:svgBlip xmlns:asvg="http://schemas.microsoft.com/office/drawing/2016/SVG/main" r:embed="rId3"/>
+              </a:ext>
+            </a:extLst>
+          </a:blip>
+          <a:stretch>
+            <a:fillRect/>
+          </a:stretch>
+        </p:blipFill>
+        <p:spPr>
+          <a:xfrm>
+            <a:off x="3580598" y="1280160"/>
+            <a:ext cx="5030804" cy="5120640"/>
+          </a:xfrm>
+          <a:prstGeom prst="rect">
+            <a:avLst/>
+          </a:prstGeom>
+        </p:spPr>
+      </p:pic>
+    </p:spTree>
+  </p:cSld>
+  <p:clrMapOvr>
+    <a:masterClrMapping/>
+  </p:clrMapOvr>
+</p:sld>
+</file>
+
+<file path=ppt/slides/slide21.xml><?xml version="1.0" encoding="utf-8"?>
+<p:sld xmlns:a="http://schemas.openxmlformats.org/drawingml/2006/main" xmlns:p="http://schemas.openxmlformats.org/presentationml/2006/main" xmlns:r="http://schemas.openxmlformats.org/officeDocument/2006/relationships">
+  <p:cSld>
+    <p:spTree>
+      <p:nvGrpSpPr>
+        <p:cNvPr id="1" name=""/>
+        <p:cNvGrpSpPr/>
+        <p:nvPr/>
+      </p:nvGrpSpPr>
+      <p:grpSpPr/>
+      <p:sp>
+        <p:nvSpPr>
+          <p:cNvPr id="2" name="TextBox 1"/>
+          <p:cNvSpPr txBox="1"/>
+          <p:nvPr/>
+        </p:nvSpPr>
+        <p:spPr>
+          <a:xfrm>
+            <a:off x="457200" y="274320"/>
+            <a:ext cx="10972800" cy="731520"/>
+          </a:xfrm>
+          <a:prstGeom prst="rect">
+            <a:avLst/>
+          </a:prstGeom>
+          <a:noFill/>
+        </p:spPr>
+        <p:txBody>
+          <a:bodyPr wrap="square">
+            <a:spAutoFit/>
+          </a:bodyPr>
+          <a:lstStyle/>
+          <a:p>
+            <a:r>
+              <a:rPr sz="2400" b="1"/>
+              <a:t>assets/05-physical/internal-longwave.svg</a:t>
+            </a:r>
+          </a:p>
+        </p:txBody>
+      </p:sp>
+      <p:pic>
+        <p:nvPicPr>
+          <p:cNvPr id="3" name="Picture 2" descr="internal-longwave.svg"/>
+          <p:cNvPicPr>
+            <a:picLocks noChangeAspect="1"/>
+          </p:cNvPicPr>
+          <p:nvPr/>
+        </p:nvPicPr>
+        <p:blipFill>
+          <a:blip r:embed="rId2">
+            <a:extLst>
+              <a:ext uri="{96DAC541-7B7A-43D3-8B79-37D633B846F1}">
+                <asvg:svgBlip xmlns:asvg="http://schemas.microsoft.com/office/drawing/2016/SVG/main" r:embed="rId3"/>
+              </a:ext>
+            </a:extLst>
+          </a:blip>
+          <a:stretch>
+            <a:fillRect/>
+          </a:stretch>
+        </p:blipFill>
+        <p:spPr>
+          <a:xfrm>
+            <a:off x="3580598" y="1280160"/>
+            <a:ext cx="5030804" cy="5120640"/>
+          </a:xfrm>
+          <a:prstGeom prst="rect">
+            <a:avLst/>
+          </a:prstGeom>
+        </p:spPr>
+      </p:pic>
+    </p:spTree>
+  </p:cSld>
+  <p:clrMapOvr>
+    <a:masterClrMapping/>
+  </p:clrMapOvr>
+</p:sld>
+</file>
+
+<file path=ppt/slides/slide22.xml><?xml version="1.0" encoding="utf-8"?>
+<p:sld xmlns:a="http://schemas.openxmlformats.org/drawingml/2006/main" xmlns:p="http://schemas.openxmlformats.org/presentationml/2006/main" xmlns:r="http://schemas.openxmlformats.org/officeDocument/2006/relationships">
+  <p:cSld>
+    <p:spTree>
+      <p:nvGrpSpPr>
+        <p:cNvPr id="1" name=""/>
+        <p:cNvGrpSpPr/>
+        <p:nvPr/>
+      </p:nvGrpSpPr>
+      <p:grpSpPr/>
+      <p:sp>
+        <p:nvSpPr>
+          <p:cNvPr id="2" name="TextBox 1"/>
+          <p:cNvSpPr txBox="1"/>
+          <p:nvPr/>
+        </p:nvSpPr>
+        <p:spPr>
+          <a:xfrm>
+            <a:off x="457200" y="274320"/>
+            <a:ext cx="10972800" cy="731520"/>
+          </a:xfrm>
+          <a:prstGeom prst="rect">
+            <a:avLst/>
+          </a:prstGeom>
+          <a:noFill/>
+        </p:spPr>
+        <p:txBody>
+          <a:bodyPr wrap="square">
+            <a:spAutoFit/>
+          </a:bodyPr>
+          <a:lstStyle/>
+          <a:p>
+            <a:r>
+              <a:rPr sz="2400" b="1"/>
+              <a:t>assets/05-physical/internal-adiabatic.svg</a:t>
+            </a:r>
+          </a:p>
+        </p:txBody>
+      </p:sp>
+      <p:pic>
+        <p:nvPicPr>
+          <p:cNvPr id="3" name="Picture 2" descr="internal-adiabatic.svg"/>
+          <p:cNvPicPr>
+            <a:picLocks noChangeAspect="1"/>
+          </p:cNvPicPr>
+          <p:nvPr/>
+        </p:nvPicPr>
+        <p:blipFill>
+          <a:blip r:embed="rId2">
+            <a:extLst>
+              <a:ext uri="{96DAC541-7B7A-43D3-8B79-37D633B846F1}">
+                <asvg:svgBlip xmlns:asvg="http://schemas.microsoft.com/office/drawing/2016/SVG/main" r:embed="rId3"/>
+              </a:ext>
+            </a:extLst>
+          </a:blip>
+          <a:stretch>
+            <a:fillRect/>
+          </a:stretch>
+        </p:blipFill>
+        <p:spPr>
+          <a:xfrm>
+            <a:off x="3580598" y="1280160"/>
+            <a:ext cx="5030804" cy="5120640"/>
+          </a:xfrm>
+          <a:prstGeom prst="rect">
+            <a:avLst/>
+          </a:prstGeom>
+        </p:spPr>
+      </p:pic>
     </p:spTree>
   </p:cSld>
   <p:clrMapOvr>

--- a/assets/illustrations.pptx
+++ b/assets/illustrations.pptx
@@ -27,6 +27,7 @@
     <p:sldId id="275" r:id="rId25"/>
     <p:sldId id="276" r:id="rId26"/>
     <p:sldId id="277" r:id="rId27"/>
+    <p:sldId id="278" r:id="rId28"/>
   </p:sldIdLst>
   <p:sldSz cx="12192000" cy="6858000"/>
   <p:notesSz cx="6858000" cy="9144000"/>
@@ -5323,6 +5324,83 @@
           <a:xfrm>
             <a:off x="3580598" y="1280160"/>
             <a:ext cx="5030804" cy="5120640"/>
+          </a:xfrm>
+          <a:prstGeom prst="rect">
+            <a:avLst/>
+          </a:prstGeom>
+        </p:spPr>
+      </p:pic>
+    </p:spTree>
+  </p:cSld>
+  <p:clrMapOvr>
+    <a:masterClrMapping/>
+  </p:clrMapOvr>
+</p:sld>
+</file>
+
+<file path=ppt/slides/slide23.xml><?xml version="1.0" encoding="utf-8"?>
+<p:sld xmlns:a="http://schemas.openxmlformats.org/drawingml/2006/main" xmlns:p="http://schemas.openxmlformats.org/presentationml/2006/main" xmlns:r="http://schemas.openxmlformats.org/officeDocument/2006/relationships">
+  <p:cSld>
+    <p:spTree>
+      <p:nvGrpSpPr>
+        <p:cNvPr id="1" name=""/>
+        <p:cNvGrpSpPr/>
+        <p:nvPr/>
+      </p:nvGrpSpPr>
+      <p:grpSpPr/>
+      <p:sp>
+        <p:nvSpPr>
+          <p:cNvPr id="2" name="TextBox 1"/>
+          <p:cNvSpPr txBox="1"/>
+          <p:nvPr/>
+        </p:nvSpPr>
+        <p:spPr>
+          <a:xfrm>
+            <a:off x="457200" y="274320"/>
+            <a:ext cx="10972800" cy="731520"/>
+          </a:xfrm>
+          <a:prstGeom prst="rect">
+            <a:avLst/>
+          </a:prstGeom>
+          <a:noFill/>
+        </p:spPr>
+        <p:txBody>
+          <a:bodyPr wrap="square">
+            <a:spAutoFit/>
+          </a:bodyPr>
+          <a:lstStyle/>
+          <a:p>
+            <a:r>
+              <a:rPr sz="2400" b="1"/>
+              <a:t>assets/04-introduction/section.svg</a:t>
+            </a:r>
+          </a:p>
+        </p:txBody>
+      </p:sp>
+      <p:pic>
+        <p:nvPicPr>
+          <p:cNvPr id="3" name="Picture 2" descr="section.svg"/>
+          <p:cNvPicPr>
+            <a:picLocks noChangeAspect="1"/>
+          </p:cNvPicPr>
+          <p:nvPr/>
+        </p:nvPicPr>
+        <p:blipFill>
+          <a:blip r:embed="rId2">
+            <a:extLst>
+              <a:ext uri="{96DAC541-7B7A-43D3-8B79-37D633B846F1}">
+                <asvg:svgBlip xmlns:asvg="http://schemas.microsoft.com/office/drawing/2016/SVG/main" r:embed="rId3"/>
+              </a:ext>
+            </a:extLst>
+          </a:blip>
+          <a:stretch>
+            <a:fillRect/>
+          </a:stretch>
+        </p:blipFill>
+        <p:spPr>
+          <a:xfrm>
+            <a:off x="3029435" y="1280160"/>
+            <a:ext cx="6133130" cy="5120640"/>
           </a:xfrm>
           <a:prstGeom prst="rect">
             <a:avLst/>

--- a/assets/illustrations.pptx
+++ b/assets/illustrations.pptx
@@ -28,6 +28,9 @@
     <p:sldId id="276" r:id="rId26"/>
     <p:sldId id="277" r:id="rId27"/>
     <p:sldId id="278" r:id="rId28"/>
+    <p:sldId id="279" r:id="rId29"/>
+    <p:sldId id="280" r:id="rId30"/>
+    <p:sldId id="281" r:id="rId31"/>
   </p:sldIdLst>
   <p:sldSz cx="12192000" cy="6858000"/>
   <p:notesSz cx="6858000" cy="9144000"/>
@@ -5401,6 +5404,237 @@
           <a:xfrm>
             <a:off x="3029435" y="1280160"/>
             <a:ext cx="6133130" cy="5120640"/>
+          </a:xfrm>
+          <a:prstGeom prst="rect">
+            <a:avLst/>
+          </a:prstGeom>
+        </p:spPr>
+      </p:pic>
+    </p:spTree>
+  </p:cSld>
+  <p:clrMapOvr>
+    <a:masterClrMapping/>
+  </p:clrMapOvr>
+</p:sld>
+</file>
+
+<file path=ppt/slides/slide24.xml><?xml version="1.0" encoding="utf-8"?>
+<p:sld xmlns:a="http://schemas.openxmlformats.org/drawingml/2006/main" xmlns:p="http://schemas.openxmlformats.org/presentationml/2006/main" xmlns:r="http://schemas.openxmlformats.org/officeDocument/2006/relationships">
+  <p:cSld>
+    <p:spTree>
+      <p:nvGrpSpPr>
+        <p:cNvPr id="1" name=""/>
+        <p:cNvGrpSpPr/>
+        <p:nvPr/>
+      </p:nvGrpSpPr>
+      <p:grpSpPr/>
+      <p:sp>
+        <p:nvSpPr>
+          <p:cNvPr id="2" name="TextBox 1"/>
+          <p:cNvSpPr txBox="1"/>
+          <p:nvPr/>
+        </p:nvSpPr>
+        <p:spPr>
+          <a:xfrm>
+            <a:off x="457200" y="274320"/>
+            <a:ext cx="10972800" cy="731520"/>
+          </a:xfrm>
+          <a:prstGeom prst="rect">
+            <a:avLst/>
+          </a:prstGeom>
+          <a:noFill/>
+        </p:spPr>
+        <p:txBody>
+          <a:bodyPr wrap="square">
+            <a:spAutoFit/>
+          </a:bodyPr>
+          <a:lstStyle/>
+          <a:p>
+            <a:r>
+              <a:rPr sz="2400" b="1"/>
+              <a:t>assets/04-introduction/why-topology.svg</a:t>
+            </a:r>
+          </a:p>
+        </p:txBody>
+      </p:sp>
+      <p:pic>
+        <p:nvPicPr>
+          <p:cNvPr id="3" name="Picture 2" descr="why-topology.svg"/>
+          <p:cNvPicPr>
+            <a:picLocks noChangeAspect="1"/>
+          </p:cNvPicPr>
+          <p:nvPr/>
+        </p:nvPicPr>
+        <p:blipFill>
+          <a:blip r:embed="rId2">
+            <a:extLst>
+              <a:ext uri="{96DAC541-7B7A-43D3-8B79-37D633B846F1}">
+                <asvg:svgBlip xmlns:asvg="http://schemas.microsoft.com/office/drawing/2016/SVG/main" r:embed="rId3"/>
+              </a:ext>
+            </a:extLst>
+          </a:blip>
+          <a:stretch>
+            <a:fillRect/>
+          </a:stretch>
+        </p:blipFill>
+        <p:spPr>
+          <a:xfrm>
+            <a:off x="2095500" y="1280160"/>
+            <a:ext cx="8001000" cy="5049981"/>
+          </a:xfrm>
+          <a:prstGeom prst="rect">
+            <a:avLst/>
+          </a:prstGeom>
+        </p:spPr>
+      </p:pic>
+    </p:spTree>
+  </p:cSld>
+  <p:clrMapOvr>
+    <a:masterClrMapping/>
+  </p:clrMapOvr>
+</p:sld>
+</file>
+
+<file path=ppt/slides/slide25.xml><?xml version="1.0" encoding="utf-8"?>
+<p:sld xmlns:a="http://schemas.openxmlformats.org/drawingml/2006/main" xmlns:p="http://schemas.openxmlformats.org/presentationml/2006/main" xmlns:r="http://schemas.openxmlformats.org/officeDocument/2006/relationships">
+  <p:cSld>
+    <p:spTree>
+      <p:nvGrpSpPr>
+        <p:cNvPr id="1" name=""/>
+        <p:cNvGrpSpPr/>
+        <p:nvPr/>
+      </p:nvGrpSpPr>
+      <p:grpSpPr/>
+      <p:sp>
+        <p:nvSpPr>
+          <p:cNvPr id="2" name="TextBox 1"/>
+          <p:cNvSpPr txBox="1"/>
+          <p:nvPr/>
+        </p:nvSpPr>
+        <p:spPr>
+          <a:xfrm>
+            <a:off x="457200" y="274320"/>
+            <a:ext cx="10972800" cy="731520"/>
+          </a:xfrm>
+          <a:prstGeom prst="rect">
+            <a:avLst/>
+          </a:prstGeom>
+          <a:noFill/>
+        </p:spPr>
+        <p:txBody>
+          <a:bodyPr wrap="square">
+            <a:spAutoFit/>
+          </a:bodyPr>
+          <a:lstStyle/>
+          <a:p>
+            <a:r>
+              <a:rPr sz="2400" b="1"/>
+              <a:t>assets/04-introduction/why-shape.svg</a:t>
+            </a:r>
+          </a:p>
+        </p:txBody>
+      </p:sp>
+      <p:pic>
+        <p:nvPicPr>
+          <p:cNvPr id="3" name="Picture 2" descr="why-shape.svg"/>
+          <p:cNvPicPr>
+            <a:picLocks noChangeAspect="1"/>
+          </p:cNvPicPr>
+          <p:nvPr/>
+        </p:nvPicPr>
+        <p:blipFill>
+          <a:blip r:embed="rId2">
+            <a:extLst>
+              <a:ext uri="{96DAC541-7B7A-43D3-8B79-37D633B846F1}">
+                <asvg:svgBlip xmlns:asvg="http://schemas.microsoft.com/office/drawing/2016/SVG/main" r:embed="rId3"/>
+              </a:ext>
+            </a:extLst>
+          </a:blip>
+          <a:stretch>
+            <a:fillRect/>
+          </a:stretch>
+        </p:blipFill>
+        <p:spPr>
+          <a:xfrm>
+            <a:off x="2095500" y="1280160"/>
+            <a:ext cx="8001000" cy="5049981"/>
+          </a:xfrm>
+          <a:prstGeom prst="rect">
+            <a:avLst/>
+          </a:prstGeom>
+        </p:spPr>
+      </p:pic>
+    </p:spTree>
+  </p:cSld>
+  <p:clrMapOvr>
+    <a:masterClrMapping/>
+  </p:clrMapOvr>
+</p:sld>
+</file>
+
+<file path=ppt/slides/slide26.xml><?xml version="1.0" encoding="utf-8"?>
+<p:sld xmlns:a="http://schemas.openxmlformats.org/drawingml/2006/main" xmlns:p="http://schemas.openxmlformats.org/presentationml/2006/main" xmlns:r="http://schemas.openxmlformats.org/officeDocument/2006/relationships">
+  <p:cSld>
+    <p:spTree>
+      <p:nvGrpSpPr>
+        <p:cNvPr id="1" name=""/>
+        <p:cNvGrpSpPr/>
+        <p:nvPr/>
+      </p:nvGrpSpPr>
+      <p:grpSpPr/>
+      <p:sp>
+        <p:nvSpPr>
+          <p:cNvPr id="2" name="TextBox 1"/>
+          <p:cNvSpPr txBox="1"/>
+          <p:nvPr/>
+        </p:nvSpPr>
+        <p:spPr>
+          <a:xfrm>
+            <a:off x="457200" y="274320"/>
+            <a:ext cx="10972800" cy="731520"/>
+          </a:xfrm>
+          <a:prstGeom prst="rect">
+            <a:avLst/>
+          </a:prstGeom>
+          <a:noFill/>
+        </p:spPr>
+        <p:txBody>
+          <a:bodyPr wrap="square">
+            <a:spAutoFit/>
+          </a:bodyPr>
+          <a:lstStyle/>
+          <a:p>
+            <a:r>
+              <a:rPr sz="2400" b="1"/>
+              <a:t>assets/04-introduction/why-both.svg</a:t>
+            </a:r>
+          </a:p>
+        </p:txBody>
+      </p:sp>
+      <p:pic>
+        <p:nvPicPr>
+          <p:cNvPr id="3" name="Picture 2" descr="why-both.svg"/>
+          <p:cNvPicPr>
+            <a:picLocks noChangeAspect="1"/>
+          </p:cNvPicPr>
+          <p:nvPr/>
+        </p:nvPicPr>
+        <p:blipFill>
+          <a:blip r:embed="rId2">
+            <a:extLst>
+              <a:ext uri="{96DAC541-7B7A-43D3-8B79-37D633B846F1}">
+                <asvg:svgBlip xmlns:asvg="http://schemas.microsoft.com/office/drawing/2016/SVG/main" r:embed="rId3"/>
+              </a:ext>
+            </a:extLst>
+          </a:blip>
+          <a:stretch>
+            <a:fillRect/>
+          </a:stretch>
+        </p:blipFill>
+        <p:spPr>
+          <a:xfrm>
+            <a:off x="2095500" y="1280160"/>
+            <a:ext cx="8001000" cy="5049981"/>
           </a:xfrm>
           <a:prstGeom prst="rect">
             <a:avLst/>
